--- a/export/week01.pptx
+++ b/export/week01.pptx
@@ -5286,7 +5286,7 @@
               </a:lnSpc>
             </a:pPr>
             <a:r>
-              <a:rPr sz="1800" b="0" spc="252">
+              <a:rPr sz="1200" b="0" spc="168">
                 <a:solidFill>
                   <a:srgbClr val="B3B7BE"/>
                 </a:solidFill>
@@ -5325,7 +5325,7 @@
               </a:lnSpc>
             </a:pPr>
             <a:r>
-              <a:rPr sz="11250" b="0" spc="-506">
+              <a:rPr sz="7500" b="0" spc="-338">
                 <a:solidFill>
                   <a:srgbClr val="FFFFFF"/>
                 </a:solidFill>
@@ -5364,7 +5364,7 @@
               </a:lnSpc>
             </a:pPr>
             <a:r>
-              <a:rPr sz="2700" b="0">
+              <a:rPr sz="1800" b="0">
                 <a:solidFill>
                   <a:srgbClr val="D3E7E8"/>
                 </a:solidFill>
@@ -5403,7 +5403,7 @@
               </a:lnSpc>
             </a:pPr>
             <a:r>
-              <a:rPr sz="2400" b="0" spc="-96">
+              <a:rPr sz="1600" b="0" spc="-64">
                 <a:solidFill>
                   <a:srgbClr val="FFFFFF"/>
                 </a:solidFill>
@@ -5412,7 +5412,7 @@
               <a:t>a·t4</a:t>
             </a:r>
             <a:r>
-              <a:rPr sz="2400" b="0" spc="-96">
+              <a:rPr sz="1600" b="0" spc="-64">
                 <a:solidFill>
                   <a:srgbClr val="ED6D24"/>
                 </a:solidFill>
@@ -5477,7 +5477,7 @@
               </a:lnSpc>
             </a:pPr>
             <a:r>
-              <a:rPr sz="1800" b="0" spc="252">
+              <a:rPr sz="1200" b="0" spc="168">
                 <a:solidFill>
                   <a:srgbClr val="5C6470"/>
                 </a:solidFill>
@@ -5516,7 +5516,7 @@
               </a:lnSpc>
             </a:pPr>
             <a:r>
-              <a:rPr sz="6900" b="0" spc="-276">
+              <a:rPr sz="4600" b="0" spc="-184">
                 <a:solidFill>
                   <a:srgbClr val="000B1C"/>
                 </a:solidFill>
@@ -5599,7 +5599,7 @@
               </a:lnSpc>
             </a:pPr>
             <a:r>
-              <a:rPr sz="2100" b="0">
+              <a:rPr sz="1400" b="0">
                 <a:solidFill>
                   <a:srgbClr val="FFFFFF"/>
                 </a:solidFill>
@@ -5638,7 +5638,7 @@
               </a:lnSpc>
             </a:pPr>
             <a:r>
-              <a:rPr sz="2550" b="0">
+              <a:rPr sz="1700" b="0">
                 <a:solidFill>
                   <a:srgbClr val="000B1C"/>
                 </a:solidFill>
@@ -5721,7 +5721,7 @@
               </a:lnSpc>
             </a:pPr>
             <a:r>
-              <a:rPr sz="2100" b="0">
+              <a:rPr sz="1400" b="0">
                 <a:solidFill>
                   <a:srgbClr val="FFFFFF"/>
                 </a:solidFill>
@@ -5760,7 +5760,7 @@
               </a:lnSpc>
             </a:pPr>
             <a:r>
-              <a:rPr sz="2550" b="0">
+              <a:rPr sz="1700" b="0">
                 <a:solidFill>
                   <a:srgbClr val="000B1C"/>
                 </a:solidFill>
@@ -5843,7 +5843,7 @@
               </a:lnSpc>
             </a:pPr>
             <a:r>
-              <a:rPr sz="2100" b="0">
+              <a:rPr sz="1400" b="0">
                 <a:solidFill>
                   <a:srgbClr val="FFFFFF"/>
                 </a:solidFill>
@@ -5882,7 +5882,7 @@
               </a:lnSpc>
             </a:pPr>
             <a:r>
-              <a:rPr sz="2550" b="0">
+              <a:rPr sz="1700" b="0">
                 <a:solidFill>
                   <a:srgbClr val="000B1C"/>
                 </a:solidFill>
@@ -5965,7 +5965,7 @@
               </a:lnSpc>
             </a:pPr>
             <a:r>
-              <a:rPr sz="2100" b="0">
+              <a:rPr sz="1400" b="0">
                 <a:solidFill>
                   <a:srgbClr val="FFFFFF"/>
                 </a:solidFill>
@@ -6004,7 +6004,7 @@
               </a:lnSpc>
             </a:pPr>
             <a:r>
-              <a:rPr sz="2550" b="0">
+              <a:rPr sz="1700" b="0">
                 <a:solidFill>
                   <a:srgbClr val="000B1C"/>
                 </a:solidFill>
@@ -6043,7 +6043,7 @@
               </a:lnSpc>
             </a:pPr>
             <a:r>
-              <a:rPr sz="1650" b="0" spc="231">
+              <a:rPr sz="1100" b="0" spc="154">
                 <a:solidFill>
                   <a:srgbClr val="5C6470"/>
                 </a:solidFill>
@@ -6082,7 +6082,7 @@
               </a:lnSpc>
             </a:pPr>
             <a:r>
-              <a:rPr sz="1650" b="0" spc="231">
+              <a:rPr sz="1100" b="0" spc="154">
                 <a:solidFill>
                   <a:srgbClr val="5C6470"/>
                 </a:solidFill>
@@ -6171,7 +6171,7 @@
               </a:lnSpc>
             </a:pPr>
             <a:r>
-              <a:rPr sz="1800" b="0" spc="252">
+              <a:rPr sz="1200" b="0" spc="168">
                 <a:solidFill>
                   <a:srgbClr val="5C6470"/>
                 </a:solidFill>
@@ -6210,7 +6210,7 @@
               </a:lnSpc>
             </a:pPr>
             <a:r>
-              <a:rPr sz="8250" b="0" spc="-330">
+              <a:rPr sz="5500" b="0" spc="-220">
                 <a:solidFill>
                   <a:srgbClr val="000B1C"/>
                 </a:solidFill>
@@ -6293,7 +6293,7 @@
               </a:lnSpc>
             </a:pPr>
             <a:r>
-              <a:rPr sz="2100" b="0">
+              <a:rPr sz="1400" b="0">
                 <a:solidFill>
                   <a:srgbClr val="FFFFFF"/>
                 </a:solidFill>
@@ -6332,7 +6332,7 @@
               </a:lnSpc>
             </a:pPr>
             <a:r>
-              <a:rPr sz="2550" b="0">
+              <a:rPr sz="1700" b="0">
                 <a:solidFill>
                   <a:srgbClr val="000B1C"/>
                 </a:solidFill>
@@ -6415,7 +6415,7 @@
               </a:lnSpc>
             </a:pPr>
             <a:r>
-              <a:rPr sz="2100" b="0">
+              <a:rPr sz="1400" b="0">
                 <a:solidFill>
                   <a:srgbClr val="FFFFFF"/>
                 </a:solidFill>
@@ -6454,7 +6454,7 @@
               </a:lnSpc>
             </a:pPr>
             <a:r>
-              <a:rPr sz="2550" b="0">
+              <a:rPr sz="1700" b="0">
                 <a:solidFill>
                   <a:srgbClr val="000B1C"/>
                 </a:solidFill>
@@ -6537,7 +6537,7 @@
               </a:lnSpc>
             </a:pPr>
             <a:r>
-              <a:rPr sz="2100" b="0">
+              <a:rPr sz="1400" b="0">
                 <a:solidFill>
                   <a:srgbClr val="FFFFFF"/>
                 </a:solidFill>
@@ -6576,7 +6576,7 @@
               </a:lnSpc>
             </a:pPr>
             <a:r>
-              <a:rPr sz="2550" b="0">
+              <a:rPr sz="1700" b="0">
                 <a:solidFill>
                   <a:srgbClr val="000B1C"/>
                 </a:solidFill>
@@ -6615,7 +6615,7 @@
               </a:lnSpc>
             </a:pPr>
             <a:r>
-              <a:rPr sz="1650" b="0" spc="231">
+              <a:rPr sz="1100" b="0" spc="154">
                 <a:solidFill>
                   <a:srgbClr val="5C6470"/>
                 </a:solidFill>
@@ -6654,7 +6654,7 @@
               </a:lnSpc>
             </a:pPr>
             <a:r>
-              <a:rPr sz="1650" b="0" spc="231">
+              <a:rPr sz="1100" b="0" spc="154">
                 <a:solidFill>
                   <a:srgbClr val="5C6470"/>
                 </a:solidFill>
@@ -6743,7 +6743,7 @@
               </a:lnSpc>
             </a:pPr>
             <a:r>
-              <a:rPr sz="1800" b="0" spc="252">
+              <a:rPr sz="1200" b="0" spc="168">
                 <a:solidFill>
                   <a:srgbClr val="F2ECF5"/>
                 </a:solidFill>
@@ -6782,7 +6782,7 @@
               </a:lnSpc>
             </a:pPr>
             <a:r>
-              <a:rPr sz="9750" b="0" spc="-439">
+              <a:rPr sz="6500" b="0" spc="-292">
                 <a:solidFill>
                   <a:srgbClr val="FFFFFF"/>
                 </a:solidFill>
@@ -6821,7 +6821,7 @@
               </a:lnSpc>
             </a:pPr>
             <a:r>
-              <a:rPr sz="2100" b="0" spc="294">
+              <a:rPr sz="1400" b="0" spc="196">
                 <a:solidFill>
                   <a:srgbClr val="F2ECF5"/>
                 </a:solidFill>
@@ -6860,7 +6860,7 @@
               </a:lnSpc>
             </a:pPr>
             <a:r>
-              <a:rPr sz="1650" b="0" spc="231">
+              <a:rPr sz="1100" b="0" spc="154">
                 <a:solidFill>
                   <a:srgbClr val="B3B7BE"/>
                 </a:solidFill>
@@ -6899,7 +6899,7 @@
               </a:lnSpc>
             </a:pPr>
             <a:r>
-              <a:rPr sz="1650" b="0" spc="231">
+              <a:rPr sz="1100" b="0" spc="154">
                 <a:solidFill>
                   <a:srgbClr val="B3B7BE"/>
                 </a:solidFill>
@@ -6964,7 +6964,7 @@
               </a:lnSpc>
             </a:pPr>
             <a:r>
-              <a:rPr sz="1800" b="0" spc="252">
+              <a:rPr sz="1200" b="0" spc="168">
                 <a:solidFill>
                   <a:srgbClr val="5C6470"/>
                 </a:solidFill>
@@ -7003,7 +7003,7 @@
               </a:lnSpc>
             </a:pPr>
             <a:r>
-              <a:rPr sz="4800" b="0" spc="-144">
+              <a:rPr sz="3200" b="0" spc="-96">
                 <a:solidFill>
                   <a:srgbClr val="000B1C"/>
                 </a:solidFill>
@@ -7086,7 +7086,7 @@
               </a:lnSpc>
             </a:pPr>
             <a:r>
-              <a:rPr sz="1950" b="0" spc="-39">
+              <a:rPr sz="1300" b="0" spc="-26">
                 <a:solidFill>
                   <a:srgbClr val="000B1C"/>
                 </a:solidFill>
@@ -7169,7 +7169,7 @@
               </a:lnSpc>
             </a:pPr>
             <a:r>
-              <a:rPr sz="1350" b="0" spc="189">
+              <a:rPr sz="900" b="0" spc="126">
                 <a:solidFill>
                   <a:srgbClr val="5C6470"/>
                 </a:solidFill>
@@ -7208,7 +7208,7 @@
               </a:lnSpc>
             </a:pPr>
             <a:r>
-              <a:rPr sz="1650" b="0" spc="-16">
+              <a:rPr sz="1100" b="0" spc="-11">
                 <a:solidFill>
                   <a:srgbClr val="000B1C"/>
                 </a:solidFill>
@@ -7335,7 +7335,7 @@
               </a:lnSpc>
             </a:pPr>
             <a:r>
-              <a:rPr sz="1350" b="0" spc="189">
+              <a:rPr sz="900" b="0" spc="126">
                 <a:solidFill>
                   <a:srgbClr val="5C6470"/>
                 </a:solidFill>
@@ -7374,7 +7374,7 @@
               </a:lnSpc>
             </a:pPr>
             <a:r>
-              <a:rPr sz="1650" b="0" spc="-16">
+              <a:rPr sz="1100" b="0" spc="-11">
                 <a:solidFill>
                   <a:srgbClr val="000B1C"/>
                 </a:solidFill>
@@ -7457,7 +7457,7 @@
               </a:lnSpc>
             </a:pPr>
             <a:r>
-              <a:rPr sz="1350" b="0" spc="189">
+              <a:rPr sz="900" b="0" spc="126">
                 <a:solidFill>
                   <a:srgbClr val="5C6470"/>
                 </a:solidFill>
@@ -7496,7 +7496,7 @@
               </a:lnSpc>
             </a:pPr>
             <a:r>
-              <a:rPr sz="1650" b="0" spc="-16">
+              <a:rPr sz="1100" b="0" spc="-11">
                 <a:solidFill>
                   <a:srgbClr val="000B1C"/>
                 </a:solidFill>
@@ -7579,7 +7579,7 @@
               </a:lnSpc>
             </a:pPr>
             <a:r>
-              <a:rPr sz="1950" b="0" spc="-39">
+              <a:rPr sz="1300" b="0" spc="-26">
                 <a:solidFill>
                   <a:srgbClr val="FFFFFF"/>
                 </a:solidFill>
@@ -7662,7 +7662,7 @@
               </a:lnSpc>
             </a:pPr>
             <a:r>
-              <a:rPr sz="1350" b="0" spc="189">
+              <a:rPr sz="900" b="0" spc="126">
                 <a:solidFill>
                   <a:srgbClr val="5C6470"/>
                 </a:solidFill>
@@ -7701,7 +7701,7 @@
               </a:lnSpc>
             </a:pPr>
             <a:r>
-              <a:rPr sz="1650" b="0" spc="-16">
+              <a:rPr sz="1100" b="0" spc="-11">
                 <a:solidFill>
                   <a:srgbClr val="000B1C"/>
                 </a:solidFill>
@@ -7784,7 +7784,7 @@
               </a:lnSpc>
             </a:pPr>
             <a:r>
-              <a:rPr sz="1350" b="0" spc="189">
+              <a:rPr sz="900" b="0" spc="126">
                 <a:solidFill>
                   <a:srgbClr val="5C6470"/>
                 </a:solidFill>
@@ -7823,7 +7823,7 @@
               </a:lnSpc>
             </a:pPr>
             <a:r>
-              <a:rPr sz="1650" b="0" spc="-16">
+              <a:rPr sz="1100" b="0" spc="-11">
                 <a:solidFill>
                   <a:srgbClr val="000B1C"/>
                 </a:solidFill>
@@ -7906,7 +7906,7 @@
               </a:lnSpc>
             </a:pPr>
             <a:r>
-              <a:rPr sz="1350" b="0" spc="189">
+              <a:rPr sz="900" b="0" spc="126">
                 <a:solidFill>
                   <a:srgbClr val="5C6470"/>
                 </a:solidFill>
@@ -7945,7 +7945,7 @@
               </a:lnSpc>
             </a:pPr>
             <a:r>
-              <a:rPr sz="1650" b="0" spc="-16">
+              <a:rPr sz="1100" b="0" spc="-11">
                 <a:solidFill>
                   <a:srgbClr val="000B1C"/>
                 </a:solidFill>
@@ -8028,7 +8028,7 @@
               </a:lnSpc>
             </a:pPr>
             <a:r>
-              <a:rPr sz="1950" b="0" spc="-39">
+              <a:rPr sz="1300" b="0" spc="-26">
                 <a:solidFill>
                   <a:srgbClr val="000B1C"/>
                 </a:solidFill>
@@ -8111,7 +8111,7 @@
               </a:lnSpc>
             </a:pPr>
             <a:r>
-              <a:rPr sz="1350" b="0" spc="189">
+              <a:rPr sz="900" b="0" spc="126">
                 <a:solidFill>
                   <a:srgbClr val="5C6470"/>
                 </a:solidFill>
@@ -8150,7 +8150,7 @@
               </a:lnSpc>
             </a:pPr>
             <a:r>
-              <a:rPr sz="1650" b="0" spc="-16">
+              <a:rPr sz="1100" b="0" spc="-11">
                 <a:solidFill>
                   <a:srgbClr val="000B1C"/>
                 </a:solidFill>
@@ -8233,7 +8233,7 @@
               </a:lnSpc>
             </a:pPr>
             <a:r>
-              <a:rPr sz="1950" b="0" spc="-39">
+              <a:rPr sz="1300" b="0" spc="-26">
                 <a:solidFill>
                   <a:srgbClr val="000B1C"/>
                 </a:solidFill>
@@ -8316,7 +8316,7 @@
               </a:lnSpc>
             </a:pPr>
             <a:r>
-              <a:rPr sz="1350" b="0" spc="189">
+              <a:rPr sz="900" b="0" spc="126">
                 <a:solidFill>
                   <a:srgbClr val="5C6470"/>
                 </a:solidFill>
@@ -8355,7 +8355,7 @@
               </a:lnSpc>
             </a:pPr>
             <a:r>
-              <a:rPr sz="1650" b="0" spc="-16">
+              <a:rPr sz="1100" b="0" spc="-11">
                 <a:solidFill>
                   <a:srgbClr val="000B1C"/>
                 </a:solidFill>
@@ -8438,7 +8438,7 @@
               </a:lnSpc>
             </a:pPr>
             <a:r>
-              <a:rPr sz="1350" b="0" spc="189">
+              <a:rPr sz="900" b="0" spc="126">
                 <a:solidFill>
                   <a:srgbClr val="5C6470"/>
                 </a:solidFill>
@@ -8477,7 +8477,7 @@
               </a:lnSpc>
             </a:pPr>
             <a:r>
-              <a:rPr sz="1650" b="0" spc="-16">
+              <a:rPr sz="1100" b="0" spc="-11">
                 <a:solidFill>
                   <a:srgbClr val="000B1C"/>
                 </a:solidFill>
@@ -8560,7 +8560,7 @@
               </a:lnSpc>
             </a:pPr>
             <a:r>
-              <a:rPr sz="1350" b="0" spc="189">
+              <a:rPr sz="900" b="0" spc="126">
                 <a:solidFill>
                   <a:srgbClr val="5C6470"/>
                 </a:solidFill>
@@ -8599,7 +8599,7 @@
               </a:lnSpc>
             </a:pPr>
             <a:r>
-              <a:rPr sz="1650" b="0" spc="-16">
+              <a:rPr sz="1100" b="0" spc="-11">
                 <a:solidFill>
                   <a:srgbClr val="000B1C"/>
                 </a:solidFill>
@@ -8682,7 +8682,7 @@
               </a:lnSpc>
             </a:pPr>
             <a:r>
-              <a:rPr sz="1950" b="0" spc="-39">
+              <a:rPr sz="1300" b="0" spc="-26">
                 <a:solidFill>
                   <a:srgbClr val="FFFFFF"/>
                 </a:solidFill>
@@ -8765,7 +8765,7 @@
               </a:lnSpc>
             </a:pPr>
             <a:r>
-              <a:rPr sz="1350" b="0" spc="189">
+              <a:rPr sz="900" b="0" spc="126">
                 <a:solidFill>
                   <a:srgbClr val="5C6470"/>
                 </a:solidFill>
@@ -8804,7 +8804,7 @@
               </a:lnSpc>
             </a:pPr>
             <a:r>
-              <a:rPr sz="1650" b="0" spc="-16">
+              <a:rPr sz="1100" b="0" spc="-11">
                 <a:solidFill>
                   <a:srgbClr val="000B1C"/>
                 </a:solidFill>
@@ -8887,7 +8887,7 @@
               </a:lnSpc>
             </a:pPr>
             <a:r>
-              <a:rPr sz="1350" b="0" spc="189">
+              <a:rPr sz="900" b="0" spc="126">
                 <a:solidFill>
                   <a:srgbClr val="5C6470"/>
                 </a:solidFill>
@@ -8926,7 +8926,7 @@
               </a:lnSpc>
             </a:pPr>
             <a:r>
-              <a:rPr sz="1650" b="0" spc="-16">
+              <a:rPr sz="1100" b="0" spc="-11">
                 <a:solidFill>
                   <a:srgbClr val="000B1C"/>
                 </a:solidFill>
@@ -9009,7 +9009,7 @@
               </a:lnSpc>
             </a:pPr>
             <a:r>
-              <a:rPr sz="1950" b="0" spc="-39">
+              <a:rPr sz="1300" b="0" spc="-26">
                 <a:solidFill>
                   <a:srgbClr val="FFFFFF"/>
                 </a:solidFill>
@@ -9092,7 +9092,7 @@
               </a:lnSpc>
             </a:pPr>
             <a:r>
-              <a:rPr sz="1350" b="0" spc="189">
+              <a:rPr sz="900" b="0" spc="126">
                 <a:solidFill>
                   <a:srgbClr val="5C6470"/>
                 </a:solidFill>
@@ -9131,7 +9131,7 @@
               </a:lnSpc>
             </a:pPr>
             <a:r>
-              <a:rPr sz="1650" b="0" spc="-16">
+              <a:rPr sz="1100" b="0" spc="-11">
                 <a:solidFill>
                   <a:srgbClr val="000B1C"/>
                 </a:solidFill>
@@ -9214,7 +9214,7 @@
               </a:lnSpc>
             </a:pPr>
             <a:r>
-              <a:rPr sz="1350" b="0" spc="189">
+              <a:rPr sz="900" b="0" spc="126">
                 <a:solidFill>
                   <a:srgbClr val="5C6470"/>
                 </a:solidFill>
@@ -9253,7 +9253,7 @@
               </a:lnSpc>
             </a:pPr>
             <a:r>
-              <a:rPr sz="1650" b="0" spc="-16">
+              <a:rPr sz="1100" b="0" spc="-11">
                 <a:solidFill>
                   <a:srgbClr val="000B1C"/>
                 </a:solidFill>
@@ -9292,7 +9292,7 @@
               </a:lnSpc>
             </a:pPr>
             <a:r>
-              <a:rPr sz="1650" b="0" spc="231">
+              <a:rPr sz="1100" b="0" spc="154">
                 <a:solidFill>
                   <a:srgbClr val="5C6470"/>
                 </a:solidFill>
@@ -9331,7 +9331,7 @@
               </a:lnSpc>
             </a:pPr>
             <a:r>
-              <a:rPr sz="1650" b="0" spc="231">
+              <a:rPr sz="1100" b="0" spc="154">
                 <a:solidFill>
                   <a:srgbClr val="5C6470"/>
                 </a:solidFill>
@@ -9445,7 +9445,7 @@
               </a:lnSpc>
             </a:pPr>
             <a:r>
-              <a:rPr sz="4800" b="0" spc="-144">
+              <a:rPr sz="3200" b="0" spc="-96">
                 <a:solidFill>
                   <a:srgbClr val="000B1C"/>
                 </a:solidFill>
@@ -9484,7 +9484,7 @@
               </a:lnSpc>
             </a:pPr>
             <a:r>
-              <a:rPr sz="1950" b="0">
+              <a:rPr sz="1300" b="0">
                 <a:solidFill>
                   <a:srgbClr val="5C6470"/>
                 </a:solidFill>
@@ -9523,7 +9523,7 @@
               </a:lnSpc>
             </a:pPr>
             <a:r>
-              <a:rPr sz="1650" b="0" spc="231">
+              <a:rPr sz="1100" b="0" spc="154">
                 <a:solidFill>
                   <a:srgbClr val="5C6470"/>
                 </a:solidFill>
@@ -9562,7 +9562,7 @@
               </a:lnSpc>
             </a:pPr>
             <a:r>
-              <a:rPr sz="1650" b="0" spc="231">
+              <a:rPr sz="1100" b="0" spc="154">
                 <a:solidFill>
                   <a:srgbClr val="5C6470"/>
                 </a:solidFill>
@@ -9627,7 +9627,7 @@
               </a:lnSpc>
             </a:pPr>
             <a:r>
-              <a:rPr sz="1800" b="0" spc="252">
+              <a:rPr sz="1200" b="0" spc="168">
                 <a:solidFill>
                   <a:srgbClr val="B3B7BE"/>
                 </a:solidFill>
@@ -9666,7 +9666,7 @@
               </a:lnSpc>
             </a:pPr>
             <a:r>
-              <a:rPr sz="7800" b="0" spc="-312">
+              <a:rPr sz="5200" b="0" spc="-208">
                 <a:solidFill>
                   <a:srgbClr val="FFFFFF"/>
                 </a:solidFill>
@@ -9705,7 +9705,7 @@
               </a:lnSpc>
             </a:pPr>
             <a:r>
-              <a:rPr sz="1650" b="0" spc="231">
+              <a:rPr sz="1100" b="0" spc="154">
                 <a:solidFill>
                   <a:srgbClr val="B3B7BE"/>
                 </a:solidFill>
@@ -9744,7 +9744,7 @@
               </a:lnSpc>
             </a:pPr>
             <a:r>
-              <a:rPr sz="1650" b="0" spc="231">
+              <a:rPr sz="1100" b="0" spc="154">
                 <a:solidFill>
                   <a:srgbClr val="B3B7BE"/>
                 </a:solidFill>
@@ -9809,7 +9809,7 @@
               </a:lnSpc>
             </a:pPr>
             <a:r>
-              <a:rPr sz="1800" b="0" spc="252">
+              <a:rPr sz="1200" b="0" spc="168">
                 <a:solidFill>
                   <a:srgbClr val="F2ECF5"/>
                 </a:solidFill>
@@ -9848,7 +9848,7 @@
               </a:lnSpc>
             </a:pPr>
             <a:r>
-              <a:rPr sz="9750" b="0" spc="-439">
+              <a:rPr sz="6500" b="0" spc="-292">
                 <a:solidFill>
                   <a:srgbClr val="FFFFFF"/>
                 </a:solidFill>
@@ -9887,7 +9887,7 @@
               </a:lnSpc>
             </a:pPr>
             <a:r>
-              <a:rPr sz="2100" b="0" spc="294">
+              <a:rPr sz="1400" b="0" spc="196">
                 <a:solidFill>
                   <a:srgbClr val="F2ECF5"/>
                 </a:solidFill>
@@ -9926,7 +9926,7 @@
               </a:lnSpc>
             </a:pPr>
             <a:r>
-              <a:rPr sz="1650" b="0" spc="231">
+              <a:rPr sz="1100" b="0" spc="154">
                 <a:solidFill>
                   <a:srgbClr val="B3B7BE"/>
                 </a:solidFill>
@@ -9965,7 +9965,7 @@
               </a:lnSpc>
             </a:pPr>
             <a:r>
-              <a:rPr sz="1650" b="0" spc="231">
+              <a:rPr sz="1100" b="0" spc="154">
                 <a:solidFill>
                   <a:srgbClr val="B3B7BE"/>
                 </a:solidFill>
@@ -10030,7 +10030,7 @@
               </a:lnSpc>
             </a:pPr>
             <a:r>
-              <a:rPr sz="1800" b="0" spc="252">
+              <a:rPr sz="1200" b="0" spc="168">
                 <a:solidFill>
                   <a:srgbClr val="5C6470"/>
                 </a:solidFill>
@@ -10069,7 +10069,7 @@
               </a:lnSpc>
             </a:pPr>
             <a:r>
-              <a:rPr sz="6900" b="0" spc="-276">
+              <a:rPr sz="4600" b="0" spc="-184">
                 <a:solidFill>
                   <a:srgbClr val="000B1C"/>
                 </a:solidFill>
@@ -10108,7 +10108,7 @@
               </a:lnSpc>
             </a:pPr>
             <a:r>
-              <a:rPr sz="2400" b="0">
+              <a:rPr sz="1600" b="0">
                 <a:solidFill>
                   <a:srgbClr val="5C6470"/>
                 </a:solidFill>
@@ -10147,7 +10147,7 @@
               </a:lnSpc>
             </a:pPr>
             <a:r>
-              <a:rPr sz="1650" b="0" spc="231">
+              <a:rPr sz="1100" b="0" spc="154">
                 <a:solidFill>
                   <a:srgbClr val="5C6470"/>
                 </a:solidFill>
@@ -10186,7 +10186,7 @@
               </a:lnSpc>
             </a:pPr>
             <a:r>
-              <a:rPr sz="1650" b="0" spc="231">
+              <a:rPr sz="1100" b="0" spc="154">
                 <a:solidFill>
                   <a:srgbClr val="5C6470"/>
                 </a:solidFill>
@@ -10275,7 +10275,7 @@
               </a:lnSpc>
             </a:pPr>
             <a:r>
-              <a:rPr sz="1800" b="0" spc="252">
+              <a:rPr sz="1200" b="0" spc="168">
                 <a:solidFill>
                   <a:srgbClr val="B3B7BE"/>
                 </a:solidFill>
@@ -10314,7 +10314,7 @@
               </a:lnSpc>
             </a:pPr>
             <a:r>
-              <a:rPr sz="8250" b="0" spc="-330">
+              <a:rPr sz="5500" b="0" spc="-220">
                 <a:solidFill>
                   <a:srgbClr val="FFFFFF"/>
                 </a:solidFill>
@@ -10353,7 +10353,7 @@
               </a:lnSpc>
             </a:pPr>
             <a:r>
-              <a:rPr sz="1650" b="0" spc="231">
+              <a:rPr sz="1100" b="0" spc="154">
                 <a:solidFill>
                   <a:srgbClr val="B3B7BE"/>
                 </a:solidFill>
@@ -10392,7 +10392,7 @@
               </a:lnSpc>
             </a:pPr>
             <a:r>
-              <a:rPr sz="1650" b="0" spc="231">
+              <a:rPr sz="1100" b="0" spc="154">
                 <a:solidFill>
                   <a:srgbClr val="B3B7BE"/>
                 </a:solidFill>
@@ -10457,7 +10457,7 @@
               </a:lnSpc>
             </a:pPr>
             <a:r>
-              <a:rPr sz="1800" b="0" spc="252">
+              <a:rPr sz="1200" b="0" spc="168">
                 <a:solidFill>
                   <a:srgbClr val="5C6470"/>
                 </a:solidFill>
@@ -10496,7 +10496,7 @@
               </a:lnSpc>
             </a:pPr>
             <a:r>
-              <a:rPr sz="5400" b="0" spc="-162">
+              <a:rPr sz="3600" b="0" spc="-108">
                 <a:solidFill>
                   <a:srgbClr val="000B1C"/>
                 </a:solidFill>
@@ -10535,7 +10535,7 @@
               </a:lnSpc>
             </a:pPr>
             <a:r>
-              <a:rPr sz="2250" b="0">
+              <a:rPr sz="1500" b="0">
                 <a:solidFill>
                   <a:srgbClr val="2A323D"/>
                 </a:solidFill>
@@ -10550,11 +10550,11 @@
                 <a:spcPct val="110500"/>
               </a:lnSpc>
               <a:spcBef>
-                <a:spcPts val="1350"/>
+                <a:spcPts val="900"/>
               </a:spcBef>
             </a:pPr>
             <a:r>
-              <a:rPr sz="2250" b="0">
+              <a:rPr sz="1500" b="0">
                 <a:solidFill>
                   <a:srgbClr val="2A323D"/>
                 </a:solidFill>
@@ -10563,7 +10563,7 @@
               <a:t>The trick: it judges the </a:t>
             </a:r>
             <a:r>
-              <a:rPr sz="2250" b="1">
+              <a:rPr sz="1500" b="1">
                 <a:solidFill>
                   <a:srgbClr val="2A323D"/>
                 </a:solidFill>
@@ -10572,7 +10572,7 @@
               <a:t>output</a:t>
             </a:r>
             <a:r>
-              <a:rPr sz="2250" b="0">
+              <a:rPr sz="1500" b="0">
                 <a:solidFill>
                   <a:srgbClr val="2A323D"/>
                 </a:solidFill>
@@ -10587,7 +10587,7 @@
                 <a:spcPct val="110500"/>
               </a:lnSpc>
               <a:spcBef>
-                <a:spcPts val="1350"/>
+                <a:spcPts val="900"/>
               </a:spcBef>
               <a:buClr>
                 <a:srgbClr val="ED6D24"/>
@@ -10596,7 +10596,7 @@
               <a:buChar char="·"/>
             </a:pPr>
             <a:r>
-              <a:rPr sz="2250" b="0">
+              <a:rPr sz="1500" b="0">
                 <a:solidFill>
                   <a:srgbClr val="2A323D"/>
                 </a:solidFill>
@@ -10611,7 +10611,7 @@
                 <a:spcPct val="110500"/>
               </a:lnSpc>
               <a:spcBef>
-                <a:spcPts val="1350"/>
+                <a:spcPts val="900"/>
               </a:spcBef>
               <a:buClr>
                 <a:srgbClr val="ED6D24"/>
@@ -10620,7 +10620,7 @@
               <a:buChar char="·"/>
             </a:pPr>
             <a:r>
-              <a:rPr sz="2250" b="0">
+              <a:rPr sz="1500" b="0">
                 <a:solidFill>
                   <a:srgbClr val="2A323D"/>
                 </a:solidFill>
@@ -10635,11 +10635,11 @@
                 <a:spcPct val="110500"/>
               </a:lnSpc>
               <a:spcBef>
-                <a:spcPts val="1350"/>
+                <a:spcPts val="900"/>
               </a:spcBef>
             </a:pPr>
             <a:r>
-              <a:rPr sz="2250" b="0">
+              <a:rPr sz="1500" b="0">
                 <a:solidFill>
                   <a:srgbClr val="2A323D"/>
                 </a:solidFill>
@@ -10703,7 +10703,7 @@
               </a:lnSpc>
             </a:pPr>
             <a:r>
-              <a:rPr sz="1500" b="0">
+              <a:rPr sz="1000" b="0">
                 <a:solidFill>
                   <a:srgbClr val="5C6470"/>
                 </a:solidFill>
@@ -10742,7 +10742,7 @@
               </a:lnSpc>
             </a:pPr>
             <a:r>
-              <a:rPr sz="1650" b="0" spc="231">
+              <a:rPr sz="1100" b="0" spc="154">
                 <a:solidFill>
                   <a:srgbClr val="5C6470"/>
                 </a:solidFill>
@@ -10781,7 +10781,7 @@
               </a:lnSpc>
             </a:pPr>
             <a:r>
-              <a:rPr sz="1650" b="0" spc="231">
+              <a:rPr sz="1100" b="0" spc="154">
                 <a:solidFill>
                   <a:srgbClr val="5C6470"/>
                 </a:solidFill>
@@ -10870,7 +10870,7 @@
               </a:lnSpc>
             </a:pPr>
             <a:r>
-              <a:rPr sz="1800" b="0" spc="252">
+              <a:rPr sz="1200" b="0" spc="168">
                 <a:solidFill>
                   <a:srgbClr val="5C6470"/>
                 </a:solidFill>
@@ -10909,7 +10909,7 @@
               </a:lnSpc>
             </a:pPr>
             <a:r>
-              <a:rPr sz="5400" b="0" spc="-162">
+              <a:rPr sz="3600" b="0" spc="-108">
                 <a:solidFill>
                   <a:srgbClr val="000B1C"/>
                 </a:solidFill>
@@ -10948,7 +10948,7 @@
               </a:lnSpc>
             </a:pPr>
             <a:r>
-              <a:rPr sz="2100" b="0">
+              <a:rPr sz="1400" b="0">
                 <a:solidFill>
                   <a:srgbClr val="ED6D24"/>
                 </a:solidFill>
@@ -10987,7 +10987,7 @@
               </a:lnSpc>
             </a:pPr>
             <a:r>
-              <a:rPr sz="2700" b="0">
+              <a:rPr sz="1800" b="0">
                 <a:solidFill>
                   <a:srgbClr val="000B1C"/>
                 </a:solidFill>
@@ -11070,7 +11070,7 @@
               </a:lnSpc>
             </a:pPr>
             <a:r>
-              <a:rPr sz="2100" b="0">
+              <a:rPr sz="1400" b="0">
                 <a:solidFill>
                   <a:srgbClr val="ED6D24"/>
                 </a:solidFill>
@@ -11109,7 +11109,7 @@
               </a:lnSpc>
             </a:pPr>
             <a:r>
-              <a:rPr sz="2700" b="0">
+              <a:rPr sz="1800" b="0">
                 <a:solidFill>
                   <a:srgbClr val="000B1C"/>
                 </a:solidFill>
@@ -11192,7 +11192,7 @@
               </a:lnSpc>
             </a:pPr>
             <a:r>
-              <a:rPr sz="2100" b="0">
+              <a:rPr sz="1400" b="0">
                 <a:solidFill>
                   <a:srgbClr val="ED6D24"/>
                 </a:solidFill>
@@ -11231,7 +11231,7 @@
               </a:lnSpc>
             </a:pPr>
             <a:r>
-              <a:rPr sz="2700" b="0">
+              <a:rPr sz="1800" b="0">
                 <a:solidFill>
                   <a:srgbClr val="000B1C"/>
                 </a:solidFill>
@@ -11314,7 +11314,7 @@
               </a:lnSpc>
             </a:pPr>
             <a:r>
-              <a:rPr sz="2100" b="0">
+              <a:rPr sz="1400" b="0">
                 <a:solidFill>
                   <a:srgbClr val="ED6D24"/>
                 </a:solidFill>
@@ -11353,7 +11353,7 @@
               </a:lnSpc>
             </a:pPr>
             <a:r>
-              <a:rPr sz="2700" b="0">
+              <a:rPr sz="1800" b="0">
                 <a:solidFill>
                   <a:srgbClr val="000B1C"/>
                 </a:solidFill>
@@ -11436,7 +11436,7 @@
               </a:lnSpc>
             </a:pPr>
             <a:r>
-              <a:rPr sz="2100" b="0">
+              <a:rPr sz="1400" b="0">
                 <a:solidFill>
                   <a:srgbClr val="ED6D24"/>
                 </a:solidFill>
@@ -11475,7 +11475,7 @@
               </a:lnSpc>
             </a:pPr>
             <a:r>
-              <a:rPr sz="2700" b="0">
+              <a:rPr sz="1800" b="0">
                 <a:solidFill>
                   <a:srgbClr val="000B1C"/>
                 </a:solidFill>
@@ -11558,7 +11558,7 @@
               </a:lnSpc>
             </a:pPr>
             <a:r>
-              <a:rPr sz="2100" b="0">
+              <a:rPr sz="1400" b="0">
                 <a:solidFill>
                   <a:srgbClr val="ED6D24"/>
                 </a:solidFill>
@@ -11597,7 +11597,7 @@
               </a:lnSpc>
             </a:pPr>
             <a:r>
-              <a:rPr sz="2700" b="0">
+              <a:rPr sz="1800" b="0">
                 <a:solidFill>
                   <a:srgbClr val="000B1C"/>
                 </a:solidFill>
@@ -11680,7 +11680,7 @@
               </a:lnSpc>
             </a:pPr>
             <a:r>
-              <a:rPr sz="2100" b="0">
+              <a:rPr sz="1400" b="0">
                 <a:solidFill>
                   <a:srgbClr val="ED6D24"/>
                 </a:solidFill>
@@ -11719,7 +11719,7 @@
               </a:lnSpc>
             </a:pPr>
             <a:r>
-              <a:rPr sz="2700" b="0">
+              <a:rPr sz="1800" b="0">
                 <a:solidFill>
                   <a:srgbClr val="000B1C"/>
                 </a:solidFill>
@@ -11802,7 +11802,7 @@
               </a:lnSpc>
             </a:pPr>
             <a:r>
-              <a:rPr sz="2100" b="0">
+              <a:rPr sz="1400" b="0">
                 <a:solidFill>
                   <a:srgbClr val="ED6D24"/>
                 </a:solidFill>
@@ -11841,7 +11841,7 @@
               </a:lnSpc>
             </a:pPr>
             <a:r>
-              <a:rPr sz="2700" b="0">
+              <a:rPr sz="1800" b="0">
                 <a:solidFill>
                   <a:srgbClr val="000B1C"/>
                 </a:solidFill>
@@ -11924,7 +11924,7 @@
               </a:lnSpc>
             </a:pPr>
             <a:r>
-              <a:rPr sz="1650" b="0" spc="231">
+              <a:rPr sz="1100" b="0" spc="154">
                 <a:solidFill>
                   <a:srgbClr val="5C6470"/>
                 </a:solidFill>
@@ -11963,7 +11963,7 @@
               </a:lnSpc>
             </a:pPr>
             <a:r>
-              <a:rPr sz="1650" b="0" spc="231">
+              <a:rPr sz="1100" b="0" spc="154">
                 <a:solidFill>
                   <a:srgbClr val="5C6470"/>
                 </a:solidFill>
@@ -12121,7 +12121,7 @@
               </a:lnSpc>
             </a:pPr>
             <a:r>
-              <a:rPr sz="1650" b="0" spc="231">
+              <a:rPr sz="1100" b="0" spc="154">
                 <a:solidFill>
                   <a:srgbClr val="B3B7BE"/>
                 </a:solidFill>
@@ -12160,7 +12160,7 @@
               </a:lnSpc>
             </a:pPr>
             <a:r>
-              <a:rPr sz="1800" b="0">
+              <a:rPr sz="1200" b="0">
                 <a:solidFill>
                   <a:srgbClr val="FFFFFF"/>
                 </a:solidFill>
@@ -12225,7 +12225,7 @@
               </a:lnSpc>
             </a:pPr>
             <a:r>
-              <a:rPr sz="1800" b="0" spc="252">
+              <a:rPr sz="1200" b="0" spc="168">
                 <a:solidFill>
                   <a:srgbClr val="B3B7BE"/>
                 </a:solidFill>
@@ -12264,7 +12264,7 @@
               </a:lnSpc>
             </a:pPr>
             <a:r>
-              <a:rPr sz="9300" b="0" spc="-372">
+              <a:rPr sz="6200" b="0" spc="-248">
                 <a:solidFill>
                   <a:srgbClr val="FFFFFF"/>
                 </a:solidFill>
@@ -12303,7 +12303,7 @@
               </a:lnSpc>
             </a:pPr>
             <a:r>
-              <a:rPr sz="1650" b="0" spc="231">
+              <a:rPr sz="1100" b="0" spc="154">
                 <a:solidFill>
                   <a:srgbClr val="B3B7BE"/>
                 </a:solidFill>
@@ -12342,7 +12342,7 @@
               </a:lnSpc>
             </a:pPr>
             <a:r>
-              <a:rPr sz="1650" b="0" spc="231">
+              <a:rPr sz="1100" b="0" spc="154">
                 <a:solidFill>
                   <a:srgbClr val="B3B7BE"/>
                 </a:solidFill>
@@ -12407,7 +12407,7 @@
               </a:lnSpc>
             </a:pPr>
             <a:r>
-              <a:rPr sz="1800" b="0" spc="252">
+              <a:rPr sz="1200" b="0" spc="168">
                 <a:solidFill>
                   <a:srgbClr val="5C6470"/>
                 </a:solidFill>
@@ -12446,7 +12446,7 @@
               </a:lnSpc>
             </a:pPr>
             <a:r>
-              <a:rPr sz="4800" b="0" spc="-144">
+              <a:rPr sz="3200" b="0" spc="-96">
                 <a:solidFill>
                   <a:srgbClr val="000B1C"/>
                 </a:solidFill>
@@ -12509,7 +12509,7 @@
               </a:lnSpc>
             </a:pPr>
             <a:r>
-              <a:rPr sz="1500" b="0">
+              <a:rPr sz="1000" b="0">
                 <a:solidFill>
                   <a:srgbClr val="5C6470"/>
                 </a:solidFill>
@@ -12548,7 +12548,7 @@
               </a:lnSpc>
             </a:pPr>
             <a:r>
-              <a:rPr sz="1650" b="0" spc="231">
+              <a:rPr sz="1100" b="0" spc="154">
                 <a:solidFill>
                   <a:srgbClr val="5C6470"/>
                 </a:solidFill>
@@ -12587,7 +12587,7 @@
               </a:lnSpc>
             </a:pPr>
             <a:r>
-              <a:rPr sz="1650" b="0" spc="231">
+              <a:rPr sz="1100" b="0" spc="154">
                 <a:solidFill>
                   <a:srgbClr val="5C6470"/>
                 </a:solidFill>
@@ -12676,7 +12676,7 @@
               </a:lnSpc>
             </a:pPr>
             <a:r>
-              <a:rPr sz="1800" b="0" spc="252">
+              <a:rPr sz="1200" b="0" spc="168">
                 <a:solidFill>
                   <a:srgbClr val="5C6470"/>
                 </a:solidFill>
@@ -12715,7 +12715,7 @@
               </a:lnSpc>
             </a:pPr>
             <a:r>
-              <a:rPr sz="5400" b="0" spc="-162">
+              <a:rPr sz="3600" b="0" spc="-108">
                 <a:solidFill>
                   <a:srgbClr val="000B1C"/>
                 </a:solidFill>
@@ -12754,7 +12754,7 @@
               </a:lnSpc>
             </a:pPr>
             <a:r>
-              <a:rPr sz="2250" b="0">
+              <a:rPr sz="1500" b="0">
                 <a:solidFill>
                   <a:srgbClr val="2A323D"/>
                 </a:solidFill>
@@ -12769,7 +12769,7 @@
                 <a:spcPct val="110500"/>
               </a:lnSpc>
               <a:spcBef>
-                <a:spcPts val="1350"/>
+                <a:spcPts val="900"/>
               </a:spcBef>
               <a:buClr>
                 <a:srgbClr val="ED6D24"/>
@@ -12778,7 +12778,7 @@
               <a:buChar char="·"/>
             </a:pPr>
             <a:r>
-              <a:rPr sz="2250" b="0">
+              <a:rPr sz="1500" b="0">
                 <a:solidFill>
                   <a:srgbClr val="2A323D"/>
                 </a:solidFill>
@@ -12793,7 +12793,7 @@
                 <a:spcPct val="110500"/>
               </a:lnSpc>
               <a:spcBef>
-                <a:spcPts val="1350"/>
+                <a:spcPts val="900"/>
               </a:spcBef>
               <a:buClr>
                 <a:srgbClr val="ED6D24"/>
@@ -12802,7 +12802,7 @@
               <a:buChar char="·"/>
             </a:pPr>
             <a:r>
-              <a:rPr sz="2250" b="0">
+              <a:rPr sz="1500" b="0">
                 <a:solidFill>
                   <a:srgbClr val="2A323D"/>
                 </a:solidFill>
@@ -12817,11 +12817,11 @@
                 <a:spcPct val="110500"/>
               </a:lnSpc>
               <a:spcBef>
-                <a:spcPts val="1350"/>
+                <a:spcPts val="900"/>
               </a:spcBef>
             </a:pPr>
             <a:r>
-              <a:rPr sz="2250" b="0">
+              <a:rPr sz="1500" b="0">
                 <a:solidFill>
                   <a:srgbClr val="2A323D"/>
                 </a:solidFill>
@@ -12885,7 +12885,7 @@
               </a:lnSpc>
             </a:pPr>
             <a:r>
-              <a:rPr sz="1500" b="0">
+              <a:rPr sz="1000" b="0">
                 <a:solidFill>
                   <a:srgbClr val="5C6470"/>
                 </a:solidFill>
@@ -12924,7 +12924,7 @@
               </a:lnSpc>
             </a:pPr>
             <a:r>
-              <a:rPr sz="1650" b="0" spc="231">
+              <a:rPr sz="1100" b="0" spc="154">
                 <a:solidFill>
                   <a:srgbClr val="5C6470"/>
                 </a:solidFill>
@@ -12963,7 +12963,7 @@
               </a:lnSpc>
             </a:pPr>
             <a:r>
-              <a:rPr sz="1650" b="0" spc="231">
+              <a:rPr sz="1100" b="0" spc="154">
                 <a:solidFill>
                   <a:srgbClr val="5C6470"/>
                 </a:solidFill>
@@ -13052,7 +13052,7 @@
               </a:lnSpc>
             </a:pPr>
             <a:r>
-              <a:rPr sz="1800" b="0" spc="252">
+              <a:rPr sz="1200" b="0" spc="168">
                 <a:solidFill>
                   <a:srgbClr val="5C6470"/>
                 </a:solidFill>
@@ -13091,7 +13091,7 @@
               </a:lnSpc>
             </a:pPr>
             <a:r>
-              <a:rPr sz="5400" b="0" spc="-162">
+              <a:rPr sz="3600" b="0" spc="-108">
                 <a:solidFill>
                   <a:srgbClr val="000B1C"/>
                 </a:solidFill>
@@ -13130,7 +13130,7 @@
               </a:lnSpc>
             </a:pPr>
             <a:r>
-              <a:rPr sz="2250" b="0">
+              <a:rPr sz="1500" b="0">
                 <a:solidFill>
                   <a:srgbClr val="2A323D"/>
                 </a:solidFill>
@@ -13145,7 +13145,7 @@
                 <a:spcPct val="110500"/>
               </a:lnSpc>
               <a:spcBef>
-                <a:spcPts val="1350"/>
+                <a:spcPts val="900"/>
               </a:spcBef>
               <a:buClr>
                 <a:srgbClr val="ED6D24"/>
@@ -13154,7 +13154,7 @@
               <a:buChar char="·"/>
             </a:pPr>
             <a:r>
-              <a:rPr sz="2250" b="0">
+              <a:rPr sz="1500" b="0">
                 <a:solidFill>
                   <a:srgbClr val="2A323D"/>
                 </a:solidFill>
@@ -13163,7 +13163,7 @@
               <a:t>Four requests, four chairs, and they are all the </a:t>
             </a:r>
             <a:r>
-              <a:rPr sz="2250" b="1">
+              <a:rPr sz="1500" b="1">
                 <a:solidFill>
                   <a:srgbClr val="2A323D"/>
                 </a:solidFill>
@@ -13172,7 +13172,7 @@
               <a:t>same</a:t>
             </a:r>
             <a:r>
-              <a:rPr sz="2250" b="0">
+              <a:rPr sz="1500" b="0">
                 <a:solidFill>
                   <a:srgbClr val="2A323D"/>
                 </a:solidFill>
@@ -13187,7 +13187,7 @@
                 <a:spcPct val="110500"/>
               </a:lnSpc>
               <a:spcBef>
-                <a:spcPts val="1350"/>
+                <a:spcPts val="900"/>
               </a:spcBef>
               <a:buClr>
                 <a:srgbClr val="ED6D24"/>
@@ -13196,7 +13196,7 @@
               <a:buChar char="·"/>
             </a:pPr>
             <a:r>
-              <a:rPr sz="2250" b="0">
+              <a:rPr sz="1500" b="0">
                 <a:solidFill>
                   <a:srgbClr val="2A323D"/>
                 </a:solidFill>
@@ -13211,11 +13211,11 @@
                 <a:spcPct val="110500"/>
               </a:lnSpc>
               <a:spcBef>
-                <a:spcPts val="1350"/>
+                <a:spcPts val="900"/>
               </a:spcBef>
             </a:pPr>
             <a:r>
-              <a:rPr sz="2250" b="0">
+              <a:rPr sz="1500" b="0">
                 <a:solidFill>
                   <a:srgbClr val="2A323D"/>
                 </a:solidFill>
@@ -13350,7 +13350,7 @@
               </a:lnSpc>
             </a:pPr>
             <a:r>
-              <a:rPr sz="1500" b="0">
+              <a:rPr sz="1000" b="0">
                 <a:solidFill>
                   <a:srgbClr val="5C6470"/>
                 </a:solidFill>
@@ -13389,7 +13389,7 @@
               </a:lnSpc>
             </a:pPr>
             <a:r>
-              <a:rPr sz="1650" b="0" spc="231">
+              <a:rPr sz="1100" b="0" spc="154">
                 <a:solidFill>
                   <a:srgbClr val="5C6470"/>
                 </a:solidFill>
@@ -13428,7 +13428,7 @@
               </a:lnSpc>
             </a:pPr>
             <a:r>
-              <a:rPr sz="1650" b="0" spc="231">
+              <a:rPr sz="1100" b="0" spc="154">
                 <a:solidFill>
                   <a:srgbClr val="5C6470"/>
                 </a:solidFill>
@@ -13517,7 +13517,7 @@
               </a:lnSpc>
             </a:pPr>
             <a:r>
-              <a:rPr sz="1800" b="0" spc="252">
+              <a:rPr sz="1200" b="0" spc="168">
                 <a:solidFill>
                   <a:srgbClr val="000B1C"/>
                 </a:solidFill>
@@ -13556,7 +13556,7 @@
               </a:lnSpc>
             </a:pPr>
             <a:r>
-              <a:rPr sz="7200" b="0" spc="-288">
+              <a:rPr sz="4800" b="0" spc="-192">
                 <a:solidFill>
                   <a:srgbClr val="000B1C"/>
                 </a:solidFill>
@@ -13595,7 +13595,7 @@
               </a:lnSpc>
             </a:pPr>
             <a:r>
-              <a:rPr sz="6300" b="0" spc="-220">
+              <a:rPr sz="4200" b="0" spc="-147">
                 <a:solidFill>
                   <a:srgbClr val="000B1C"/>
                 </a:solidFill>
@@ -13634,7 +13634,7 @@
               </a:lnSpc>
             </a:pPr>
             <a:r>
-              <a:rPr sz="2550" b="0">
+              <a:rPr sz="1700" b="0">
                 <a:solidFill>
                   <a:srgbClr val="000B1C"/>
                 </a:solidFill>
@@ -13673,7 +13673,7 @@
               </a:lnSpc>
             </a:pPr>
             <a:r>
-              <a:rPr sz="1650" b="0" spc="231">
+              <a:rPr sz="1100" b="0" spc="154">
                 <a:solidFill>
                   <a:srgbClr val="5C6470"/>
                 </a:solidFill>
@@ -13712,7 +13712,7 @@
               </a:lnSpc>
             </a:pPr>
             <a:r>
-              <a:rPr sz="1650" b="0" spc="231">
+              <a:rPr sz="1100" b="0" spc="154">
                 <a:solidFill>
                   <a:srgbClr val="5C6470"/>
                 </a:solidFill>
@@ -13777,7 +13777,7 @@
               </a:lnSpc>
             </a:pPr>
             <a:r>
-              <a:rPr sz="1800" b="0" spc="252">
+              <a:rPr sz="1200" b="0" spc="168">
                 <a:solidFill>
                   <a:srgbClr val="5C6470"/>
                 </a:solidFill>
@@ -13816,7 +13816,7 @@
               </a:lnSpc>
             </a:pPr>
             <a:r>
-              <a:rPr sz="4800" b="0" spc="-144">
+              <a:rPr sz="3200" b="0" spc="-96">
                 <a:solidFill>
                   <a:srgbClr val="000B1C"/>
                 </a:solidFill>
@@ -13855,7 +13855,7 @@
               </a:lnSpc>
             </a:pPr>
             <a:r>
-              <a:rPr sz="2250" b="0">
+              <a:rPr sz="1500" b="0">
                 <a:solidFill>
                   <a:srgbClr val="2A323D"/>
                 </a:solidFill>
@@ -13918,7 +13918,7 @@
               </a:lnSpc>
             </a:pPr>
             <a:r>
-              <a:rPr sz="1500" b="0">
+              <a:rPr sz="1000" b="0">
                 <a:solidFill>
                   <a:srgbClr val="5C6470"/>
                 </a:solidFill>
@@ -13957,7 +13957,7 @@
               </a:lnSpc>
             </a:pPr>
             <a:r>
-              <a:rPr sz="1650" b="0" spc="231">
+              <a:rPr sz="1100" b="0" spc="154">
                 <a:solidFill>
                   <a:srgbClr val="5C6470"/>
                 </a:solidFill>
@@ -13996,7 +13996,7 @@
               </a:lnSpc>
             </a:pPr>
             <a:r>
-              <a:rPr sz="1650" b="0" spc="231">
+              <a:rPr sz="1100" b="0" spc="154">
                 <a:solidFill>
                   <a:srgbClr val="5C6470"/>
                 </a:solidFill>
@@ -14085,7 +14085,7 @@
               </a:lnSpc>
             </a:pPr>
             <a:r>
-              <a:rPr sz="1800" b="0" spc="252">
+              <a:rPr sz="1200" b="0" spc="168">
                 <a:solidFill>
                   <a:srgbClr val="5C6470"/>
                 </a:solidFill>
@@ -14124,7 +14124,7 @@
               </a:lnSpc>
             </a:pPr>
             <a:r>
-              <a:rPr sz="5400" b="0" spc="-162">
+              <a:rPr sz="3600" b="0" spc="-108">
                 <a:solidFill>
                   <a:srgbClr val="000B1C"/>
                 </a:solidFill>
@@ -14163,7 +14163,7 @@
               </a:lnSpc>
             </a:pPr>
             <a:r>
-              <a:rPr sz="2250" b="0">
+              <a:rPr sz="1500" b="0">
                 <a:solidFill>
                   <a:srgbClr val="2A323D"/>
                 </a:solidFill>
@@ -14178,7 +14178,7 @@
                 <a:spcPct val="110500"/>
               </a:lnSpc>
               <a:spcBef>
-                <a:spcPts val="1350"/>
+                <a:spcPts val="900"/>
               </a:spcBef>
               <a:buClr>
                 <a:srgbClr val="ED6D24"/>
@@ -14187,7 +14187,7 @@
               <a:buChar char="·"/>
             </a:pPr>
             <a:r>
-              <a:rPr sz="2250" b="0">
+              <a:rPr sz="1500" b="0">
                 <a:solidFill>
                   <a:srgbClr val="2A323D"/>
                 </a:solidFill>
@@ -14202,7 +14202,7 @@
                 <a:spcPct val="110500"/>
               </a:lnSpc>
               <a:spcBef>
-                <a:spcPts val="1350"/>
+                <a:spcPts val="900"/>
               </a:spcBef>
               <a:buClr>
                 <a:srgbClr val="ED6D24"/>
@@ -14211,7 +14211,7 @@
               <a:buChar char="·"/>
             </a:pPr>
             <a:r>
-              <a:rPr sz="2250" b="0">
+              <a:rPr sz="1500" b="0">
                 <a:solidFill>
                   <a:srgbClr val="2A323D"/>
                 </a:solidFill>
@@ -14226,11 +14226,11 @@
                 <a:spcPct val="110500"/>
               </a:lnSpc>
               <a:spcBef>
-                <a:spcPts val="1350"/>
+                <a:spcPts val="900"/>
               </a:spcBef>
             </a:pPr>
             <a:r>
-              <a:rPr sz="2250" b="0">
+              <a:rPr sz="1500" b="0">
                 <a:solidFill>
                   <a:srgbClr val="2A323D"/>
                 </a:solidFill>
@@ -14294,7 +14294,7 @@
               </a:lnSpc>
             </a:pPr>
             <a:r>
-              <a:rPr sz="1500" b="0">
+              <a:rPr sz="1000" b="0">
                 <a:solidFill>
                   <a:srgbClr val="5C6470"/>
                 </a:solidFill>
@@ -14333,7 +14333,7 @@
               </a:lnSpc>
             </a:pPr>
             <a:r>
-              <a:rPr sz="1650" b="0" spc="231">
+              <a:rPr sz="1100" b="0" spc="154">
                 <a:solidFill>
                   <a:srgbClr val="5C6470"/>
                 </a:solidFill>
@@ -14372,7 +14372,7 @@
               </a:lnSpc>
             </a:pPr>
             <a:r>
-              <a:rPr sz="1650" b="0" spc="231">
+              <a:rPr sz="1100" b="0" spc="154">
                 <a:solidFill>
                   <a:srgbClr val="5C6470"/>
                 </a:solidFill>
@@ -14461,7 +14461,7 @@
               </a:lnSpc>
             </a:pPr>
             <a:r>
-              <a:rPr sz="1800" b="0" spc="252">
+              <a:rPr sz="1200" b="0" spc="168">
                 <a:solidFill>
                   <a:srgbClr val="5C6470"/>
                 </a:solidFill>
@@ -14500,7 +14500,7 @@
               </a:lnSpc>
             </a:pPr>
             <a:r>
-              <a:rPr sz="8250" b="0" spc="-330">
+              <a:rPr sz="5500" b="0" spc="-220">
                 <a:solidFill>
                   <a:srgbClr val="000B1C"/>
                 </a:solidFill>
@@ -14583,7 +14583,7 @@
               </a:lnSpc>
             </a:pPr>
             <a:r>
-              <a:rPr sz="2100" b="0">
+              <a:rPr sz="1400" b="0">
                 <a:solidFill>
                   <a:srgbClr val="FFFFFF"/>
                 </a:solidFill>
@@ -14622,7 +14622,7 @@
               </a:lnSpc>
             </a:pPr>
             <a:r>
-              <a:rPr sz="2550" b="0">
+              <a:rPr sz="1700" b="0">
                 <a:solidFill>
                   <a:srgbClr val="000B1C"/>
                 </a:solidFill>
@@ -14705,7 +14705,7 @@
               </a:lnSpc>
             </a:pPr>
             <a:r>
-              <a:rPr sz="2100" b="0">
+              <a:rPr sz="1400" b="0">
                 <a:solidFill>
                   <a:srgbClr val="FFFFFF"/>
                 </a:solidFill>
@@ -14744,7 +14744,7 @@
               </a:lnSpc>
             </a:pPr>
             <a:r>
-              <a:rPr sz="2550" b="0">
+              <a:rPr sz="1700" b="0">
                 <a:solidFill>
                   <a:srgbClr val="000B1C"/>
                 </a:solidFill>
@@ -14827,7 +14827,7 @@
               </a:lnSpc>
             </a:pPr>
             <a:r>
-              <a:rPr sz="2100" b="0">
+              <a:rPr sz="1400" b="0">
                 <a:solidFill>
                   <a:srgbClr val="FFFFFF"/>
                 </a:solidFill>
@@ -14866,7 +14866,7 @@
               </a:lnSpc>
             </a:pPr>
             <a:r>
-              <a:rPr sz="2550" b="0">
+              <a:rPr sz="1700" b="0">
                 <a:solidFill>
                   <a:srgbClr val="000B1C"/>
                 </a:solidFill>
@@ -14949,7 +14949,7 @@
               </a:lnSpc>
             </a:pPr>
             <a:r>
-              <a:rPr sz="2100" b="0">
+              <a:rPr sz="1400" b="0">
                 <a:solidFill>
                   <a:srgbClr val="FFFFFF"/>
                 </a:solidFill>
@@ -14988,7 +14988,7 @@
               </a:lnSpc>
             </a:pPr>
             <a:r>
-              <a:rPr sz="2550" b="0">
+              <a:rPr sz="1700" b="0">
                 <a:solidFill>
                   <a:srgbClr val="000B1C"/>
                 </a:solidFill>
@@ -15027,7 +15027,7 @@
               </a:lnSpc>
             </a:pPr>
             <a:r>
-              <a:rPr sz="1650" b="0" spc="231">
+              <a:rPr sz="1100" b="0" spc="154">
                 <a:solidFill>
                   <a:srgbClr val="5C6470"/>
                 </a:solidFill>
@@ -15066,7 +15066,7 @@
               </a:lnSpc>
             </a:pPr>
             <a:r>
-              <a:rPr sz="1650" b="0" spc="231">
+              <a:rPr sz="1100" b="0" spc="154">
                 <a:solidFill>
                   <a:srgbClr val="5C6470"/>
                 </a:solidFill>
@@ -15155,7 +15155,7 @@
               </a:lnSpc>
             </a:pPr>
             <a:r>
-              <a:rPr sz="1800" b="0" spc="252">
+              <a:rPr sz="1200" b="0" spc="168">
                 <a:solidFill>
                   <a:srgbClr val="5C6470"/>
                 </a:solidFill>
@@ -15194,7 +15194,7 @@
               </a:lnSpc>
             </a:pPr>
             <a:r>
-              <a:rPr sz="5400" b="0" spc="-162">
+              <a:rPr sz="3600" b="0" spc="-108">
                 <a:solidFill>
                   <a:srgbClr val="000B1C"/>
                 </a:solidFill>
@@ -15277,7 +15277,7 @@
               </a:lnSpc>
             </a:pPr>
             <a:r>
-              <a:rPr sz="1650" b="0" spc="231">
+              <a:rPr sz="1100" b="0" spc="154">
                 <a:solidFill>
                   <a:srgbClr val="ED6D24"/>
                 </a:solidFill>
@@ -15316,7 +15316,7 @@
               </a:lnSpc>
             </a:pPr>
             <a:r>
-              <a:rPr sz="3000" b="0" spc="-60">
+              <a:rPr sz="2000" b="0" spc="-40">
                 <a:solidFill>
                   <a:srgbClr val="000B1C"/>
                 </a:solidFill>
@@ -15355,7 +15355,7 @@
               </a:lnSpc>
             </a:pPr>
             <a:r>
-              <a:rPr sz="2250" b="0">
+              <a:rPr sz="1500" b="0">
                 <a:solidFill>
                   <a:srgbClr val="2A323D"/>
                 </a:solidFill>
@@ -15438,7 +15438,7 @@
               </a:lnSpc>
             </a:pPr>
             <a:r>
-              <a:rPr sz="1650" b="0" spc="231">
+              <a:rPr sz="1100" b="0" spc="154">
                 <a:solidFill>
                   <a:srgbClr val="ED6D24"/>
                 </a:solidFill>
@@ -15477,7 +15477,7 @@
               </a:lnSpc>
             </a:pPr>
             <a:r>
-              <a:rPr sz="3000" b="0" spc="-60">
+              <a:rPr sz="2000" b="0" spc="-40">
                 <a:solidFill>
                   <a:srgbClr val="000B1C"/>
                 </a:solidFill>
@@ -15516,7 +15516,7 @@
               </a:lnSpc>
             </a:pPr>
             <a:r>
-              <a:rPr sz="2250" b="0">
+              <a:rPr sz="1500" b="0">
                 <a:solidFill>
                   <a:srgbClr val="2A323D"/>
                 </a:solidFill>
@@ -15599,7 +15599,7 @@
               </a:lnSpc>
             </a:pPr>
             <a:r>
-              <a:rPr sz="1650" b="0" spc="231">
+              <a:rPr sz="1100" b="0" spc="154">
                 <a:solidFill>
                   <a:srgbClr val="ED6D24"/>
                 </a:solidFill>
@@ -15638,7 +15638,7 @@
               </a:lnSpc>
             </a:pPr>
             <a:r>
-              <a:rPr sz="3000" b="0" spc="-60">
+              <a:rPr sz="2000" b="0" spc="-40">
                 <a:solidFill>
                   <a:srgbClr val="000B1C"/>
                 </a:solidFill>
@@ -15677,7 +15677,7 @@
               </a:lnSpc>
             </a:pPr>
             <a:r>
-              <a:rPr sz="2250" b="0">
+              <a:rPr sz="1500" b="0">
                 <a:solidFill>
                   <a:srgbClr val="2A323D"/>
                 </a:solidFill>
@@ -15716,7 +15716,7 @@
               </a:lnSpc>
             </a:pPr>
             <a:r>
-              <a:rPr sz="1650" b="0" spc="231">
+              <a:rPr sz="1100" b="0" spc="154">
                 <a:solidFill>
                   <a:srgbClr val="5C6470"/>
                 </a:solidFill>
@@ -15755,7 +15755,7 @@
               </a:lnSpc>
             </a:pPr>
             <a:r>
-              <a:rPr sz="1650" b="0" spc="231">
+              <a:rPr sz="1100" b="0" spc="154">
                 <a:solidFill>
                   <a:srgbClr val="5C6470"/>
                 </a:solidFill>
@@ -15844,7 +15844,7 @@
               </a:lnSpc>
             </a:pPr>
             <a:r>
-              <a:rPr sz="1800" b="0" spc="252">
+              <a:rPr sz="1200" b="0" spc="168">
                 <a:solidFill>
                   <a:srgbClr val="5C6470"/>
                 </a:solidFill>
@@ -15883,7 +15883,7 @@
               </a:lnSpc>
             </a:pPr>
             <a:r>
-              <a:rPr sz="8250" b="0" spc="-330">
+              <a:rPr sz="5500" b="0" spc="-220">
                 <a:solidFill>
                   <a:srgbClr val="000B1C"/>
                 </a:solidFill>
@@ -15922,7 +15922,7 @@
               </a:lnSpc>
             </a:pPr>
             <a:r>
-              <a:rPr sz="2400" b="0">
+              <a:rPr sz="1600" b="0">
                 <a:solidFill>
                   <a:srgbClr val="5C6470"/>
                 </a:solidFill>
@@ -15961,7 +15961,7 @@
               </a:lnSpc>
             </a:pPr>
             <a:r>
-              <a:rPr sz="1650" b="0" spc="231">
+              <a:rPr sz="1100" b="0" spc="154">
                 <a:solidFill>
                   <a:srgbClr val="5C6470"/>
                 </a:solidFill>
@@ -16000,7 +16000,7 @@
               </a:lnSpc>
             </a:pPr>
             <a:r>
-              <a:rPr sz="1650" b="0" spc="231">
+              <a:rPr sz="1100" b="0" spc="154">
                 <a:solidFill>
                   <a:srgbClr val="5C6470"/>
                 </a:solidFill>
@@ -16089,7 +16089,7 @@
               </a:lnSpc>
             </a:pPr>
             <a:r>
-              <a:rPr sz="1800" b="0" spc="252">
+              <a:rPr sz="1200" b="0" spc="168">
                 <a:solidFill>
                   <a:srgbClr val="5C6470"/>
                 </a:solidFill>
@@ -16128,7 +16128,7 @@
               </a:lnSpc>
             </a:pPr>
             <a:r>
-              <a:rPr sz="5400" b="0" spc="-162">
+              <a:rPr sz="3600" b="0" spc="-108">
                 <a:solidFill>
                   <a:srgbClr val="000B1C"/>
                 </a:solidFill>
@@ -16211,7 +16211,7 @@
               </a:lnSpc>
             </a:pPr>
             <a:r>
-              <a:rPr sz="1950" b="0" spc="117">
+              <a:rPr sz="1300" b="0" spc="78">
                 <a:solidFill>
                   <a:srgbClr val="ED6D24"/>
                 </a:solidFill>
@@ -16294,7 +16294,7 @@
               </a:lnSpc>
             </a:pPr>
             <a:r>
-              <a:rPr sz="2025" b="0" spc="-40">
+              <a:rPr sz="1350" b="0" spc="-27">
                 <a:solidFill>
                   <a:srgbClr val="000B1C"/>
                 </a:solidFill>
@@ -16333,7 +16333,7 @@
               </a:lnSpc>
             </a:pPr>
             <a:r>
-              <a:rPr sz="1650" b="0">
+              <a:rPr sz="1100" b="0">
                 <a:solidFill>
                   <a:srgbClr val="2A323D"/>
                 </a:solidFill>
@@ -16372,7 +16372,7 @@
               </a:lnSpc>
             </a:pPr>
             <a:r>
-              <a:rPr sz="1950" b="0" spc="117">
+              <a:rPr sz="1300" b="0" spc="78">
                 <a:solidFill>
                   <a:srgbClr val="ED6D24"/>
                 </a:solidFill>
@@ -16455,7 +16455,7 @@
               </a:lnSpc>
             </a:pPr>
             <a:r>
-              <a:rPr sz="2025" b="0" spc="-40">
+              <a:rPr sz="1350" b="0" spc="-27">
                 <a:solidFill>
                   <a:srgbClr val="000B1C"/>
                 </a:solidFill>
@@ -16494,7 +16494,7 @@
               </a:lnSpc>
             </a:pPr>
             <a:r>
-              <a:rPr sz="1650" b="0">
+              <a:rPr sz="1100" b="0">
                 <a:solidFill>
                   <a:srgbClr val="2A323D"/>
                 </a:solidFill>
@@ -16533,7 +16533,7 @@
               </a:lnSpc>
             </a:pPr>
             <a:r>
-              <a:rPr sz="1950" b="0" spc="117">
+              <a:rPr sz="1300" b="0" spc="78">
                 <a:solidFill>
                   <a:srgbClr val="ED6D24"/>
                 </a:solidFill>
@@ -16616,7 +16616,7 @@
               </a:lnSpc>
             </a:pPr>
             <a:r>
-              <a:rPr sz="2025" b="0" spc="-40">
+              <a:rPr sz="1350" b="0" spc="-27">
                 <a:solidFill>
                   <a:srgbClr val="000B1C"/>
                 </a:solidFill>
@@ -16655,7 +16655,7 @@
               </a:lnSpc>
             </a:pPr>
             <a:r>
-              <a:rPr sz="1650" b="0">
+              <a:rPr sz="1100" b="0">
                 <a:solidFill>
                   <a:srgbClr val="2A323D"/>
                 </a:solidFill>
@@ -16694,7 +16694,7 @@
               </a:lnSpc>
             </a:pPr>
             <a:r>
-              <a:rPr sz="1950" b="0" spc="117">
+              <a:rPr sz="1300" b="0" spc="78">
                 <a:solidFill>
                   <a:srgbClr val="ED6D24"/>
                 </a:solidFill>
@@ -16777,7 +16777,7 @@
               </a:lnSpc>
             </a:pPr>
             <a:r>
-              <a:rPr sz="2025" b="0" spc="-40">
+              <a:rPr sz="1350" b="0" spc="-27">
                 <a:solidFill>
                   <a:srgbClr val="000B1C"/>
                 </a:solidFill>
@@ -16816,7 +16816,7 @@
               </a:lnSpc>
             </a:pPr>
             <a:r>
-              <a:rPr sz="1650" b="0">
+              <a:rPr sz="1100" b="0">
                 <a:solidFill>
                   <a:srgbClr val="2A323D"/>
                 </a:solidFill>
@@ -16855,7 +16855,7 @@
               </a:lnSpc>
             </a:pPr>
             <a:r>
-              <a:rPr sz="1950" b="0" spc="117">
+              <a:rPr sz="1300" b="0" spc="78">
                 <a:solidFill>
                   <a:srgbClr val="ED6D24"/>
                 </a:solidFill>
@@ -16938,7 +16938,7 @@
               </a:lnSpc>
             </a:pPr>
             <a:r>
-              <a:rPr sz="2025" b="0" spc="-40">
+              <a:rPr sz="1350" b="0" spc="-27">
                 <a:solidFill>
                   <a:srgbClr val="000B1C"/>
                 </a:solidFill>
@@ -16977,7 +16977,7 @@
               </a:lnSpc>
             </a:pPr>
             <a:r>
-              <a:rPr sz="1650" b="0">
+              <a:rPr sz="1100" b="0">
                 <a:solidFill>
                   <a:srgbClr val="2A323D"/>
                 </a:solidFill>
@@ -17016,7 +17016,7 @@
               </a:lnSpc>
             </a:pPr>
             <a:r>
-              <a:rPr sz="1950" b="0" spc="117">
+              <a:rPr sz="1300" b="0" spc="78">
                 <a:solidFill>
                   <a:srgbClr val="ED6D24"/>
                 </a:solidFill>
@@ -17099,7 +17099,7 @@
               </a:lnSpc>
             </a:pPr>
             <a:r>
-              <a:rPr sz="2025" b="0" spc="-40">
+              <a:rPr sz="1350" b="0" spc="-27">
                 <a:solidFill>
                   <a:srgbClr val="000B1C"/>
                 </a:solidFill>
@@ -17138,7 +17138,7 @@
               </a:lnSpc>
             </a:pPr>
             <a:r>
-              <a:rPr sz="1650" b="0">
+              <a:rPr sz="1100" b="0">
                 <a:solidFill>
                   <a:srgbClr val="2A323D"/>
                 </a:solidFill>
@@ -17177,7 +17177,7 @@
               </a:lnSpc>
             </a:pPr>
             <a:r>
-              <a:rPr sz="1950" b="0" spc="117">
+              <a:rPr sz="1300" b="0" spc="78">
                 <a:solidFill>
                   <a:srgbClr val="ED6D24"/>
                 </a:solidFill>
@@ -17260,7 +17260,7 @@
               </a:lnSpc>
             </a:pPr>
             <a:r>
-              <a:rPr sz="2025" b="0" spc="-40">
+              <a:rPr sz="1350" b="0" spc="-27">
                 <a:solidFill>
                   <a:srgbClr val="000B1C"/>
                 </a:solidFill>
@@ -17299,7 +17299,7 @@
               </a:lnSpc>
             </a:pPr>
             <a:r>
-              <a:rPr sz="1650" b="0">
+              <a:rPr sz="1100" b="0">
                 <a:solidFill>
                   <a:srgbClr val="2A323D"/>
                 </a:solidFill>
@@ -17338,7 +17338,7 @@
               </a:lnSpc>
             </a:pPr>
             <a:r>
-              <a:rPr sz="1950" b="0" spc="117">
+              <a:rPr sz="1300" b="0" spc="78">
                 <a:solidFill>
                   <a:srgbClr val="ED6D24"/>
                 </a:solidFill>
@@ -17421,7 +17421,7 @@
               </a:lnSpc>
             </a:pPr>
             <a:r>
-              <a:rPr sz="2025" b="0" spc="-40">
+              <a:rPr sz="1350" b="0" spc="-27">
                 <a:solidFill>
                   <a:srgbClr val="000B1C"/>
                 </a:solidFill>
@@ -17460,7 +17460,7 @@
               </a:lnSpc>
             </a:pPr>
             <a:r>
-              <a:rPr sz="1650" b="0">
+              <a:rPr sz="1100" b="0">
                 <a:solidFill>
                   <a:srgbClr val="2A323D"/>
                 </a:solidFill>
@@ -17499,7 +17499,7 @@
               </a:lnSpc>
             </a:pPr>
             <a:r>
-              <a:rPr sz="1650" b="0" spc="231">
+              <a:rPr sz="1100" b="0" spc="154">
                 <a:solidFill>
                   <a:srgbClr val="5C6470"/>
                 </a:solidFill>
@@ -17538,7 +17538,7 @@
               </a:lnSpc>
             </a:pPr>
             <a:r>
-              <a:rPr sz="1650" b="0" spc="231">
+              <a:rPr sz="1100" b="0" spc="154">
                 <a:solidFill>
                   <a:srgbClr val="5C6470"/>
                 </a:solidFill>
@@ -17695,7 +17695,7 @@
               </a:lnSpc>
             </a:pPr>
             <a:r>
-              <a:rPr sz="1650" b="0" spc="231">
+              <a:rPr sz="1100" b="0" spc="154">
                 <a:solidFill>
                   <a:srgbClr val="B3B7BE"/>
                 </a:solidFill>
@@ -17734,7 +17734,7 @@
               </a:lnSpc>
             </a:pPr>
             <a:r>
-              <a:rPr sz="1800" b="0">
+              <a:rPr sz="1200" b="0">
                 <a:solidFill>
                   <a:srgbClr val="FFFFFF"/>
                 </a:solidFill>
@@ -17799,7 +17799,7 @@
               </a:lnSpc>
             </a:pPr>
             <a:r>
-              <a:rPr sz="1800" b="0" spc="252">
+              <a:rPr sz="1200" b="0" spc="168">
                 <a:solidFill>
                   <a:srgbClr val="5C6470"/>
                 </a:solidFill>
@@ -17838,7 +17838,7 @@
               </a:lnSpc>
             </a:pPr>
             <a:r>
-              <a:rPr sz="5400" b="0" spc="-162">
+              <a:rPr sz="3600" b="0" spc="-108">
                 <a:solidFill>
                   <a:srgbClr val="000B1C"/>
                 </a:solidFill>
@@ -17877,7 +17877,7 @@
               </a:lnSpc>
             </a:pPr>
             <a:r>
-              <a:rPr sz="2100" b="0">
+              <a:rPr sz="1400" b="0">
                 <a:solidFill>
                   <a:srgbClr val="2A323D"/>
                 </a:solidFill>
@@ -17892,7 +17892,7 @@
                 <a:spcPct val="112000"/>
               </a:lnSpc>
               <a:spcBef>
-                <a:spcPts val="1350"/>
+                <a:spcPts val="900"/>
               </a:spcBef>
               <a:buClr>
                 <a:srgbClr val="ED6D24"/>
@@ -17901,7 +17901,7 @@
               <a:buChar char="·"/>
             </a:pPr>
             <a:r>
-              <a:rPr sz="2100" b="0">
+              <a:rPr sz="1400" b="0">
                 <a:solidFill>
                   <a:srgbClr val="2A323D"/>
                 </a:solidFill>
@@ -17916,7 +17916,7 @@
                 <a:spcPct val="112000"/>
               </a:lnSpc>
               <a:spcBef>
-                <a:spcPts val="1350"/>
+                <a:spcPts val="900"/>
               </a:spcBef>
               <a:buClr>
                 <a:srgbClr val="ED6D24"/>
@@ -17925,7 +17925,7 @@
               <a:buChar char="·"/>
             </a:pPr>
             <a:r>
-              <a:rPr sz="2100" b="0">
+              <a:rPr sz="1400" b="0">
                 <a:solidFill>
                   <a:srgbClr val="2A323D"/>
                 </a:solidFill>
@@ -17940,7 +17940,7 @@
                 <a:spcPct val="112000"/>
               </a:lnSpc>
               <a:spcBef>
-                <a:spcPts val="1350"/>
+                <a:spcPts val="900"/>
               </a:spcBef>
               <a:buClr>
                 <a:srgbClr val="ED6D24"/>
@@ -17949,7 +17949,7 @@
               <a:buChar char="·"/>
             </a:pPr>
             <a:r>
-              <a:rPr sz="2100" b="0">
+              <a:rPr sz="1400" b="0">
                 <a:solidFill>
                   <a:srgbClr val="2A323D"/>
                 </a:solidFill>
@@ -18012,7 +18012,7 @@
               </a:lnSpc>
             </a:pPr>
             <a:r>
-              <a:rPr sz="1650" b="0" spc="231">
+              <a:rPr sz="1100" b="0" spc="154">
                 <a:solidFill>
                   <a:srgbClr val="5C6470"/>
                 </a:solidFill>
@@ -18051,7 +18051,7 @@
               </a:lnSpc>
             </a:pPr>
             <a:r>
-              <a:rPr sz="1650" b="0" spc="231">
+              <a:rPr sz="1100" b="0" spc="154">
                 <a:solidFill>
                   <a:srgbClr val="5C6470"/>
                 </a:solidFill>
@@ -18140,7 +18140,7 @@
               </a:lnSpc>
             </a:pPr>
             <a:r>
-              <a:rPr sz="1800" b="0" spc="252">
+              <a:rPr sz="1200" b="0" spc="168">
                 <a:solidFill>
                   <a:srgbClr val="5C6470"/>
                 </a:solidFill>
@@ -18179,7 +18179,7 @@
               </a:lnSpc>
             </a:pPr>
             <a:r>
-              <a:rPr sz="5400" b="0" spc="-162">
+              <a:rPr sz="3600" b="0" spc="-108">
                 <a:solidFill>
                   <a:srgbClr val="000B1C"/>
                 </a:solidFill>
@@ -18218,7 +18218,7 @@
               </a:lnSpc>
             </a:pPr>
             <a:r>
-              <a:rPr sz="2250" b="0">
+              <a:rPr sz="1500" b="0">
                 <a:solidFill>
                   <a:srgbClr val="2A323D"/>
                 </a:solidFill>
@@ -18233,7 +18233,7 @@
                 <a:spcPct val="110500"/>
               </a:lnSpc>
               <a:spcBef>
-                <a:spcPts val="1350"/>
+                <a:spcPts val="900"/>
               </a:spcBef>
               <a:buClr>
                 <a:srgbClr val="ED6D24"/>
@@ -18242,7 +18242,7 @@
               <a:buChar char="·"/>
             </a:pPr>
             <a:r>
-              <a:rPr sz="2250" b="0">
+              <a:rPr sz="1500" b="0">
                 <a:solidFill>
                   <a:srgbClr val="2A323D"/>
                 </a:solidFill>
@@ -18257,7 +18257,7 @@
                 <a:spcPct val="110500"/>
               </a:lnSpc>
               <a:spcBef>
-                <a:spcPts val="1350"/>
+                <a:spcPts val="900"/>
               </a:spcBef>
               <a:buClr>
                 <a:srgbClr val="ED6D24"/>
@@ -18266,7 +18266,7 @@
               <a:buChar char="·"/>
             </a:pPr>
             <a:r>
-              <a:rPr sz="2250" b="0">
+              <a:rPr sz="1500" b="0">
                 <a:solidFill>
                   <a:srgbClr val="2A323D"/>
                 </a:solidFill>
@@ -18281,11 +18281,11 @@
                 <a:spcPct val="110500"/>
               </a:lnSpc>
               <a:spcBef>
-                <a:spcPts val="1350"/>
+                <a:spcPts val="900"/>
               </a:spcBef>
             </a:pPr>
             <a:r>
-              <a:rPr sz="2250" b="0">
+              <a:rPr sz="1500" b="0">
                 <a:solidFill>
                   <a:srgbClr val="2A323D"/>
                 </a:solidFill>
@@ -18349,7 +18349,7 @@
               </a:lnSpc>
             </a:pPr>
             <a:r>
-              <a:rPr sz="1650" b="0">
+              <a:rPr sz="1100" b="0">
                 <a:solidFill>
                   <a:srgbClr val="5C6470"/>
                 </a:solidFill>
@@ -18389,7 +18389,7 @@
               </a:lnSpc>
             </a:pPr>
             <a:r>
-              <a:rPr sz="1650" b="0" spc="231">
+              <a:rPr sz="1100" b="0" spc="154">
                 <a:solidFill>
                   <a:srgbClr val="5C6470"/>
                 </a:solidFill>
@@ -18428,7 +18428,7 @@
               </a:lnSpc>
             </a:pPr>
             <a:r>
-              <a:rPr sz="1650" b="0" spc="231">
+              <a:rPr sz="1100" b="0" spc="154">
                 <a:solidFill>
                   <a:srgbClr val="5C6470"/>
                 </a:solidFill>
@@ -18586,7 +18586,7 @@
               </a:lnSpc>
             </a:pPr>
             <a:r>
-              <a:rPr sz="1650" b="0" spc="231">
+              <a:rPr sz="1100" b="0" spc="154">
                 <a:solidFill>
                   <a:srgbClr val="B3B7BE"/>
                 </a:solidFill>
@@ -18625,7 +18625,7 @@
               </a:lnSpc>
             </a:pPr>
             <a:r>
-              <a:rPr sz="1800" b="0">
+              <a:rPr sz="1200" b="0">
                 <a:solidFill>
                   <a:srgbClr val="FFFFFF"/>
                 </a:solidFill>
@@ -18690,7 +18690,7 @@
               </a:lnSpc>
             </a:pPr>
             <a:r>
-              <a:rPr sz="1800" b="0" spc="252">
+              <a:rPr sz="1200" b="0" spc="168">
                 <a:solidFill>
                   <a:srgbClr val="F2ECF5"/>
                 </a:solidFill>
@@ -18729,7 +18729,7 @@
               </a:lnSpc>
             </a:pPr>
             <a:r>
-              <a:rPr sz="9750" b="0" spc="-439">
+              <a:rPr sz="6500" b="0" spc="-292">
                 <a:solidFill>
                   <a:srgbClr val="FFFFFF"/>
                 </a:solidFill>
@@ -18768,7 +18768,7 @@
               </a:lnSpc>
             </a:pPr>
             <a:r>
-              <a:rPr sz="2100" b="0" spc="294">
+              <a:rPr sz="1400" b="0" spc="196">
                 <a:solidFill>
                   <a:srgbClr val="F2ECF5"/>
                 </a:solidFill>
@@ -18807,7 +18807,7 @@
               </a:lnSpc>
             </a:pPr>
             <a:r>
-              <a:rPr sz="1650" b="0" spc="231">
+              <a:rPr sz="1100" b="0" spc="154">
                 <a:solidFill>
                   <a:srgbClr val="B3B7BE"/>
                 </a:solidFill>
@@ -18846,7 +18846,7 @@
               </a:lnSpc>
             </a:pPr>
             <a:r>
-              <a:rPr sz="1650" b="0" spc="231">
+              <a:rPr sz="1100" b="0" spc="154">
                 <a:solidFill>
                   <a:srgbClr val="B3B7BE"/>
                 </a:solidFill>
@@ -18911,7 +18911,7 @@
               </a:lnSpc>
             </a:pPr>
             <a:r>
-              <a:rPr sz="1800" b="0" spc="252">
+              <a:rPr sz="1200" b="0" spc="168">
                 <a:solidFill>
                   <a:srgbClr val="5C6470"/>
                 </a:solidFill>
@@ -18950,7 +18950,7 @@
               </a:lnSpc>
             </a:pPr>
             <a:r>
-              <a:rPr sz="5400" b="0" spc="-162">
+              <a:rPr sz="3600" b="0" spc="-108">
                 <a:solidFill>
                   <a:srgbClr val="000B1C"/>
                 </a:solidFill>
@@ -19033,7 +19033,7 @@
               </a:lnSpc>
             </a:pPr>
             <a:r>
-              <a:rPr sz="1650" b="0" spc="231">
+              <a:rPr sz="1100" b="0" spc="154">
                 <a:solidFill>
                   <a:srgbClr val="ED6D24"/>
                 </a:solidFill>
@@ -19072,7 +19072,7 @@
               </a:lnSpc>
             </a:pPr>
             <a:r>
-              <a:rPr sz="3300" b="0" spc="-66">
+              <a:rPr sz="2200" b="0" spc="-44">
                 <a:solidFill>
                   <a:srgbClr val="000B1C"/>
                 </a:solidFill>
@@ -19111,7 +19111,7 @@
               </a:lnSpc>
             </a:pPr>
             <a:r>
-              <a:rPr sz="2250" b="0">
+              <a:rPr sz="1500" b="0">
                 <a:solidFill>
                   <a:srgbClr val="2A323D"/>
                 </a:solidFill>
@@ -19120,7 +19120,7 @@
               <a:t>AI as a tool in </a:t>
             </a:r>
             <a:r>
-              <a:rPr sz="2250" b="1">
+              <a:rPr sz="1500" b="1">
                 <a:solidFill>
                   <a:srgbClr val="2A323D"/>
                 </a:solidFill>
@@ -19129,7 +19129,7 @@
               <a:t>how</a:t>
             </a:r>
             <a:r>
-              <a:rPr sz="2250" b="0">
+              <a:rPr sz="1500" b="0">
                 <a:solidFill>
                   <a:srgbClr val="2A323D"/>
                 </a:solidFill>
@@ -19144,11 +19144,11 @@
                 <a:spcPct val="110500"/>
               </a:lnSpc>
               <a:spcBef>
-                <a:spcPts val="900"/>
+                <a:spcPts val="600"/>
               </a:spcBef>
             </a:pPr>
             <a:r>
-              <a:rPr sz="2250" b="0">
+              <a:rPr sz="1500" b="0">
                 <a:solidFill>
                   <a:srgbClr val="2A323D"/>
                 </a:solidFill>
@@ -19231,7 +19231,7 @@
               </a:lnSpc>
             </a:pPr>
             <a:r>
-              <a:rPr sz="1650" b="0" spc="231">
+              <a:rPr sz="1100" b="0" spc="154">
                 <a:solidFill>
                   <a:srgbClr val="ED6D24"/>
                 </a:solidFill>
@@ -19270,7 +19270,7 @@
               </a:lnSpc>
             </a:pPr>
             <a:r>
-              <a:rPr sz="3300" b="0" spc="-66">
+              <a:rPr sz="2200" b="0" spc="-44">
                 <a:solidFill>
                   <a:srgbClr val="000B1C"/>
                 </a:solidFill>
@@ -19309,7 +19309,7 @@
               </a:lnSpc>
             </a:pPr>
             <a:r>
-              <a:rPr sz="2250" b="0">
+              <a:rPr sz="1500" b="0">
                 <a:solidFill>
                   <a:srgbClr val="2A323D"/>
                 </a:solidFill>
@@ -19318,7 +19318,7 @@
               <a:t>AI as a material in </a:t>
             </a:r>
             <a:r>
-              <a:rPr sz="2250" b="1">
+              <a:rPr sz="1500" b="1">
                 <a:solidFill>
                   <a:srgbClr val="2A323D"/>
                 </a:solidFill>
@@ -19327,7 +19327,7 @@
               <a:t>what</a:t>
             </a:r>
             <a:r>
-              <a:rPr sz="2250" b="0">
+              <a:rPr sz="1500" b="0">
                 <a:solidFill>
                   <a:srgbClr val="2A323D"/>
                 </a:solidFill>
@@ -19342,11 +19342,11 @@
                 <a:spcPct val="110500"/>
               </a:lnSpc>
               <a:spcBef>
-                <a:spcPts val="900"/>
+                <a:spcPts val="600"/>
               </a:spcBef>
             </a:pPr>
             <a:r>
-              <a:rPr sz="2250" b="0">
+              <a:rPr sz="1500" b="0">
                 <a:solidFill>
                   <a:srgbClr val="2A323D"/>
                 </a:solidFill>
@@ -19385,7 +19385,7 @@
               </a:lnSpc>
             </a:pPr>
             <a:r>
-              <a:rPr sz="1650" b="0" spc="231">
+              <a:rPr sz="1100" b="0" spc="154">
                 <a:solidFill>
                   <a:srgbClr val="5C6470"/>
                 </a:solidFill>
@@ -19424,7 +19424,7 @@
               </a:lnSpc>
             </a:pPr>
             <a:r>
-              <a:rPr sz="1650" b="0" spc="231">
+              <a:rPr sz="1100" b="0" spc="154">
                 <a:solidFill>
                   <a:srgbClr val="5C6470"/>
                 </a:solidFill>
@@ -19513,7 +19513,7 @@
               </a:lnSpc>
             </a:pPr>
             <a:r>
-              <a:rPr sz="1800" b="0" spc="252">
+              <a:rPr sz="1200" b="0" spc="168">
                 <a:solidFill>
                   <a:srgbClr val="5C6470"/>
                 </a:solidFill>
@@ -19552,7 +19552,7 @@
               </a:lnSpc>
             </a:pPr>
             <a:r>
-              <a:rPr sz="5400" b="0" spc="-162">
+              <a:rPr sz="3600" b="0" spc="-108">
                 <a:solidFill>
                   <a:srgbClr val="000B1C"/>
                 </a:solidFill>
@@ -19635,7 +19635,7 @@
               </a:lnSpc>
             </a:pPr>
             <a:r>
-              <a:rPr sz="1650" b="0" spc="231">
+              <a:rPr sz="1100" b="0" spc="154">
                 <a:solidFill>
                   <a:srgbClr val="ED6D24"/>
                 </a:solidFill>
@@ -19674,7 +19674,7 @@
               </a:lnSpc>
             </a:pPr>
             <a:r>
-              <a:rPr sz="3000" b="0" spc="-60">
+              <a:rPr sz="2000" b="0" spc="-40">
                 <a:solidFill>
                   <a:srgbClr val="000B1C"/>
                 </a:solidFill>
@@ -19713,7 +19713,7 @@
               </a:lnSpc>
             </a:pPr>
             <a:r>
-              <a:rPr sz="1800" b="0">
+              <a:rPr sz="1200" b="0">
                 <a:solidFill>
                   <a:srgbClr val="2A323D"/>
                 </a:solidFill>
@@ -19796,7 +19796,7 @@
               </a:lnSpc>
             </a:pPr>
             <a:r>
-              <a:rPr sz="1650" b="0" spc="231">
+              <a:rPr sz="1100" b="0" spc="154">
                 <a:solidFill>
                   <a:srgbClr val="ED6D24"/>
                 </a:solidFill>
@@ -19835,7 +19835,7 @@
               </a:lnSpc>
             </a:pPr>
             <a:r>
-              <a:rPr sz="3000" b="0" spc="-60">
+              <a:rPr sz="2000" b="0" spc="-40">
                 <a:solidFill>
                   <a:srgbClr val="000B1C"/>
                 </a:solidFill>
@@ -19874,7 +19874,7 @@
               </a:lnSpc>
             </a:pPr>
             <a:r>
-              <a:rPr sz="1800" b="0">
+              <a:rPr sz="1200" b="0">
                 <a:solidFill>
                   <a:srgbClr val="2A323D"/>
                 </a:solidFill>
@@ -19883,7 +19883,7 @@
               <a:t>The same film, several pieces of artwork; a model picks the one you are most likely to click. The poster designer no longer makes one image — they design a </a:t>
             </a:r>
             <a:r>
-              <a:rPr sz="1800" b="1">
+              <a:rPr sz="1200" b="1">
                 <a:solidFill>
                   <a:srgbClr val="2A323D"/>
                 </a:solidFill>
@@ -19892,7 +19892,7 @@
               <a:t>space</a:t>
             </a:r>
             <a:r>
-              <a:rPr sz="1800" b="0">
+              <a:rPr sz="1200" b="0">
                 <a:solidFill>
                   <a:srgbClr val="2A323D"/>
                 </a:solidFill>
@@ -19975,7 +19975,7 @@
               </a:lnSpc>
             </a:pPr>
             <a:r>
-              <a:rPr sz="1650" b="0" spc="231">
+              <a:rPr sz="1100" b="0" spc="154">
                 <a:solidFill>
                   <a:srgbClr val="ED6D24"/>
                 </a:solidFill>
@@ -20014,7 +20014,7 @@
               </a:lnSpc>
             </a:pPr>
             <a:r>
-              <a:rPr sz="3000" b="0" spc="-60">
+              <a:rPr sz="2000" b="0" spc="-40">
                 <a:solidFill>
                   <a:srgbClr val="000B1C"/>
                 </a:solidFill>
@@ -20053,7 +20053,7 @@
               </a:lnSpc>
             </a:pPr>
             <a:r>
-              <a:rPr sz="1800" b="0">
+              <a:rPr sz="1200" b="0">
                 <a:solidFill>
                   <a:srgbClr val="2A323D"/>
                 </a:solidFill>
@@ -20092,7 +20092,7 @@
               </a:lnSpc>
             </a:pPr>
             <a:r>
-              <a:rPr sz="1650" b="0" spc="231">
+              <a:rPr sz="1100" b="0" spc="154">
                 <a:solidFill>
                   <a:srgbClr val="5C6470"/>
                 </a:solidFill>
@@ -20131,7 +20131,7 @@
               </a:lnSpc>
             </a:pPr>
             <a:r>
-              <a:rPr sz="1650" b="0" spc="231">
+              <a:rPr sz="1100" b="0" spc="154">
                 <a:solidFill>
                   <a:srgbClr val="5C6470"/>
                 </a:solidFill>
@@ -20220,7 +20220,7 @@
               </a:lnSpc>
             </a:pPr>
             <a:r>
-              <a:rPr sz="1800" b="0" spc="252">
+              <a:rPr sz="1200" b="0" spc="168">
                 <a:solidFill>
                   <a:srgbClr val="5C6470"/>
                 </a:solidFill>
@@ -20259,7 +20259,7 @@
               </a:lnSpc>
             </a:pPr>
             <a:r>
-              <a:rPr sz="6900" b="0" spc="-276">
+              <a:rPr sz="4600" b="0" spc="-184">
                 <a:solidFill>
                   <a:srgbClr val="000B1C"/>
                 </a:solidFill>
@@ -20298,7 +20298,7 @@
               </a:lnSpc>
             </a:pPr>
             <a:r>
-              <a:rPr sz="2400" b="0">
+              <a:rPr sz="1600" b="0">
                 <a:solidFill>
                   <a:srgbClr val="5C6470"/>
                 </a:solidFill>
@@ -20337,7 +20337,7 @@
               </a:lnSpc>
             </a:pPr>
             <a:r>
-              <a:rPr sz="1650" b="0" spc="231">
+              <a:rPr sz="1100" b="0" spc="154">
                 <a:solidFill>
                   <a:srgbClr val="5C6470"/>
                 </a:solidFill>
@@ -20376,7 +20376,7 @@
               </a:lnSpc>
             </a:pPr>
             <a:r>
-              <a:rPr sz="1650" b="0" spc="231">
+              <a:rPr sz="1100" b="0" spc="154">
                 <a:solidFill>
                   <a:srgbClr val="5C6470"/>
                 </a:solidFill>
@@ -20465,7 +20465,7 @@
               </a:lnSpc>
             </a:pPr>
             <a:r>
-              <a:rPr sz="1800" b="0" spc="252">
+              <a:rPr sz="1200" b="0" spc="168">
                 <a:solidFill>
                   <a:srgbClr val="5C6470"/>
                 </a:solidFill>
@@ -20504,7 +20504,7 @@
               </a:lnSpc>
             </a:pPr>
             <a:r>
-              <a:rPr sz="5400" b="0" spc="-162">
+              <a:rPr sz="3600" b="0" spc="-108">
                 <a:solidFill>
                   <a:srgbClr val="000B1C"/>
                 </a:solidFill>
@@ -20543,7 +20543,7 @@
               </a:lnSpc>
             </a:pPr>
             <a:r>
-              <a:rPr sz="2100" b="0">
+              <a:rPr sz="1400" b="0">
                 <a:solidFill>
                   <a:srgbClr val="2A323D"/>
                 </a:solidFill>
@@ -20559,7 +20559,7 @@
                 <a:spcPct val="112000"/>
               </a:lnSpc>
               <a:spcBef>
-                <a:spcPts val="1350"/>
+                <a:spcPts val="900"/>
               </a:spcBef>
               <a:buClr>
                 <a:srgbClr val="ED6D24"/>
@@ -20568,7 +20568,7 @@
               <a:buChar char="·"/>
             </a:pPr>
             <a:r>
-              <a:rPr sz="2100" b="1">
+              <a:rPr sz="1400" b="1">
                 <a:solidFill>
                   <a:srgbClr val="2A323D"/>
                 </a:solidFill>
@@ -20577,7 +20577,7 @@
               <a:t>Before week 3:</a:t>
             </a:r>
             <a:r>
-              <a:rPr sz="2100" b="0">
+              <a:rPr sz="1400" b="0">
                 <a:solidFill>
                   <a:srgbClr val="2A323D"/>
                 </a:solidFill>
@@ -20592,7 +20592,7 @@
                 <a:spcPct val="112000"/>
               </a:lnSpc>
               <a:spcBef>
-                <a:spcPts val="1350"/>
+                <a:spcPts val="900"/>
               </a:spcBef>
               <a:buClr>
                 <a:srgbClr val="ED6D24"/>
@@ -20601,7 +20601,7 @@
               <a:buChar char="·"/>
             </a:pPr>
             <a:r>
-              <a:rPr sz="2100" b="1">
+              <a:rPr sz="1400" b="1">
                 <a:solidFill>
                   <a:srgbClr val="2A323D"/>
                 </a:solidFill>
@@ -20610,7 +20610,7 @@
               <a:t>Week 4:</a:t>
             </a:r>
             <a:r>
-              <a:rPr sz="2100" b="0">
+              <a:rPr sz="1400" b="0">
                 <a:solidFill>
                   <a:srgbClr val="2A323D"/>
                 </a:solidFill>
@@ -20625,7 +20625,7 @@
                 <a:spcPct val="112000"/>
               </a:lnSpc>
               <a:spcBef>
-                <a:spcPts val="1350"/>
+                <a:spcPts val="900"/>
               </a:spcBef>
               <a:buClr>
                 <a:srgbClr val="ED6D24"/>
@@ -20634,7 +20634,7 @@
               <a:buChar char="·"/>
             </a:pPr>
             <a:r>
-              <a:rPr sz="2100" b="1">
+              <a:rPr sz="1400" b="1">
                 <a:solidFill>
                   <a:srgbClr val="2A323D"/>
                 </a:solidFill>
@@ -20643,7 +20643,7 @@
               <a:t>Week 5:</a:t>
             </a:r>
             <a:r>
-              <a:rPr sz="2100" b="0">
+              <a:rPr sz="1400" b="0">
                 <a:solidFill>
                   <a:srgbClr val="2A323D"/>
                 </a:solidFill>
@@ -20658,7 +20658,7 @@
                 <a:spcPct val="112000"/>
               </a:lnSpc>
               <a:spcBef>
-                <a:spcPts val="1350"/>
+                <a:spcPts val="900"/>
               </a:spcBef>
               <a:buClr>
                 <a:srgbClr val="ED6D24"/>
@@ -20667,7 +20667,7 @@
               <a:buChar char="·"/>
             </a:pPr>
             <a:r>
-              <a:rPr sz="2100" b="1">
+              <a:rPr sz="1400" b="1">
                 <a:solidFill>
                   <a:srgbClr val="2A323D"/>
                 </a:solidFill>
@@ -20676,7 +20676,7 @@
               <a:t>Week 6:</a:t>
             </a:r>
             <a:r>
-              <a:rPr sz="2100" b="0">
+              <a:rPr sz="1400" b="0">
                 <a:solidFill>
                   <a:srgbClr val="2A323D"/>
                 </a:solidFill>
@@ -20685,7 +20685,7 @@
               <a:t> AI sound and music. </a:t>
             </a:r>
             <a:r>
-              <a:rPr sz="2100" b="1">
+              <a:rPr sz="1400" b="1">
                 <a:solidFill>
                   <a:srgbClr val="2A323D"/>
                 </a:solidFill>
@@ -20694,7 +20694,7 @@
               <a:t>Week 12:</a:t>
             </a:r>
             <a:r>
-              <a:rPr sz="2100" b="0">
+              <a:rPr sz="1400" b="0">
                 <a:solidFill>
                   <a:srgbClr val="2A323D"/>
                 </a:solidFill>
@@ -20758,7 +20758,7 @@
               </a:lnSpc>
             </a:pPr>
             <a:r>
-              <a:rPr sz="1500" b="0">
+              <a:rPr sz="1000" b="0">
                 <a:solidFill>
                   <a:srgbClr val="5C6470"/>
                 </a:solidFill>
@@ -20797,7 +20797,7 @@
               </a:lnSpc>
             </a:pPr>
             <a:r>
-              <a:rPr sz="1650" b="0" spc="231">
+              <a:rPr sz="1100" b="0" spc="154">
                 <a:solidFill>
                   <a:srgbClr val="5C6470"/>
                 </a:solidFill>
@@ -20836,7 +20836,7 @@
               </a:lnSpc>
             </a:pPr>
             <a:r>
-              <a:rPr sz="1650" b="0" spc="231">
+              <a:rPr sz="1100" b="0" spc="154">
                 <a:solidFill>
                   <a:srgbClr val="5C6470"/>
                 </a:solidFill>
@@ -20925,7 +20925,7 @@
               </a:lnSpc>
             </a:pPr>
             <a:r>
-              <a:rPr sz="1800" b="0" spc="252">
+              <a:rPr sz="1200" b="0" spc="168">
                 <a:solidFill>
                   <a:srgbClr val="F2ECF5"/>
                 </a:solidFill>
@@ -20964,7 +20964,7 @@
               </a:lnSpc>
             </a:pPr>
             <a:r>
-              <a:rPr sz="9750" b="0" spc="-439">
+              <a:rPr sz="6500" b="0" spc="-292">
                 <a:solidFill>
                   <a:srgbClr val="FFFFFF"/>
                 </a:solidFill>
@@ -21003,7 +21003,7 @@
               </a:lnSpc>
             </a:pPr>
             <a:r>
-              <a:rPr sz="2100" b="0" spc="294">
+              <a:rPr sz="1400" b="0" spc="196">
                 <a:solidFill>
                   <a:srgbClr val="F2ECF5"/>
                 </a:solidFill>
@@ -21042,7 +21042,7 @@
               </a:lnSpc>
             </a:pPr>
             <a:r>
-              <a:rPr sz="1650" b="0" spc="231">
+              <a:rPr sz="1100" b="0" spc="154">
                 <a:solidFill>
                   <a:srgbClr val="B3B7BE"/>
                 </a:solidFill>
@@ -21081,7 +21081,7 @@
               </a:lnSpc>
             </a:pPr>
             <a:r>
-              <a:rPr sz="1650" b="0" spc="231">
+              <a:rPr sz="1100" b="0" spc="154">
                 <a:solidFill>
                   <a:srgbClr val="B3B7BE"/>
                 </a:solidFill>
@@ -21146,7 +21146,7 @@
               </a:lnSpc>
             </a:pPr>
             <a:r>
-              <a:rPr sz="1800" b="0" spc="252">
+              <a:rPr sz="1200" b="0" spc="168">
                 <a:solidFill>
                   <a:srgbClr val="F2ECF5"/>
                 </a:solidFill>
@@ -21185,7 +21185,7 @@
               </a:lnSpc>
             </a:pPr>
             <a:r>
-              <a:rPr sz="9750" b="0" spc="-439">
+              <a:rPr sz="6500" b="0" spc="-292">
                 <a:solidFill>
                   <a:srgbClr val="FFFFFF"/>
                 </a:solidFill>
@@ -21224,7 +21224,7 @@
               </a:lnSpc>
             </a:pPr>
             <a:r>
-              <a:rPr sz="2100" b="0" spc="294">
+              <a:rPr sz="1400" b="0" spc="196">
                 <a:solidFill>
                   <a:srgbClr val="F2ECF5"/>
                 </a:solidFill>
@@ -21263,7 +21263,7 @@
               </a:lnSpc>
             </a:pPr>
             <a:r>
-              <a:rPr sz="1650" b="0" spc="231">
+              <a:rPr sz="1100" b="0" spc="154">
                 <a:solidFill>
                   <a:srgbClr val="B3B7BE"/>
                 </a:solidFill>
@@ -21302,7 +21302,7 @@
               </a:lnSpc>
             </a:pPr>
             <a:r>
-              <a:rPr sz="1650" b="0" spc="231">
+              <a:rPr sz="1100" b="0" spc="154">
                 <a:solidFill>
                   <a:srgbClr val="B3B7BE"/>
                 </a:solidFill>
@@ -21367,7 +21367,7 @@
               </a:lnSpc>
             </a:pPr>
             <a:r>
-              <a:rPr sz="6600" b="0" spc="-198">
+              <a:rPr sz="4400" b="0" spc="-132">
                 <a:solidFill>
                   <a:srgbClr val="000B1C"/>
                 </a:solidFill>
@@ -21406,7 +21406,7 @@
               </a:lnSpc>
             </a:pPr>
             <a:r>
-              <a:rPr sz="1950" b="0">
+              <a:rPr sz="1300" b="0">
                 <a:solidFill>
                   <a:srgbClr val="5C6470"/>
                 </a:solidFill>
@@ -21445,7 +21445,7 @@
               </a:lnSpc>
             </a:pPr>
             <a:r>
-              <a:rPr sz="1650" b="0" spc="231">
+              <a:rPr sz="1100" b="0" spc="154">
                 <a:solidFill>
                   <a:srgbClr val="5C6470"/>
                 </a:solidFill>
@@ -21484,7 +21484,7 @@
               </a:lnSpc>
             </a:pPr>
             <a:r>
-              <a:rPr sz="1650" b="0" spc="231">
+              <a:rPr sz="1100" b="0" spc="154">
                 <a:solidFill>
                   <a:srgbClr val="5C6470"/>
                 </a:solidFill>
@@ -21549,7 +21549,7 @@
               </a:lnSpc>
             </a:pPr>
             <a:r>
-              <a:rPr sz="1800" b="0" spc="252">
+              <a:rPr sz="1200" b="0" spc="168">
                 <a:solidFill>
                   <a:srgbClr val="5C6470"/>
                 </a:solidFill>
@@ -21588,7 +21588,7 @@
               </a:lnSpc>
             </a:pPr>
             <a:r>
-              <a:rPr sz="4800" b="0" spc="-144">
+              <a:rPr sz="3200" b="0" spc="-96">
                 <a:solidFill>
                   <a:srgbClr val="000B1C"/>
                 </a:solidFill>
@@ -21627,7 +21627,7 @@
               </a:lnSpc>
             </a:pPr>
             <a:r>
-              <a:rPr sz="2250" b="0">
+              <a:rPr sz="1500" b="0">
                 <a:solidFill>
                   <a:srgbClr val="2A323D"/>
                 </a:solidFill>
@@ -21690,7 +21690,7 @@
               </a:lnSpc>
             </a:pPr>
             <a:r>
-              <a:rPr sz="1500" b="0">
+              <a:rPr sz="1000" b="0">
                 <a:solidFill>
                   <a:srgbClr val="5C6470"/>
                 </a:solidFill>
@@ -21729,7 +21729,7 @@
               </a:lnSpc>
             </a:pPr>
             <a:r>
-              <a:rPr sz="1650" b="0" spc="231">
+              <a:rPr sz="1100" b="0" spc="154">
                 <a:solidFill>
                   <a:srgbClr val="5C6470"/>
                 </a:solidFill>
@@ -21768,7 +21768,7 @@
               </a:lnSpc>
             </a:pPr>
             <a:r>
-              <a:rPr sz="1650" b="0" spc="231">
+              <a:rPr sz="1100" b="0" spc="154">
                 <a:solidFill>
                   <a:srgbClr val="5C6470"/>
                 </a:solidFill>
@@ -21857,7 +21857,7 @@
               </a:lnSpc>
             </a:pPr>
             <a:r>
-              <a:rPr sz="1800" b="0" spc="252">
+              <a:rPr sz="1200" b="0" spc="168">
                 <a:solidFill>
                   <a:srgbClr val="5C6470"/>
                 </a:solidFill>
@@ -21896,7 +21896,7 @@
               </a:lnSpc>
             </a:pPr>
             <a:r>
-              <a:rPr sz="5400" b="0" spc="-162">
+              <a:rPr sz="3600" b="0" spc="-108">
                 <a:solidFill>
                   <a:srgbClr val="000B1C"/>
                 </a:solidFill>
@@ -21979,7 +21979,7 @@
               </a:lnSpc>
             </a:pPr>
             <a:r>
-              <a:rPr sz="1650" b="0" spc="231">
+              <a:rPr sz="1100" b="0" spc="154">
                 <a:solidFill>
                   <a:srgbClr val="ED6D24"/>
                 </a:solidFill>
@@ -22018,7 +22018,7 @@
               </a:lnSpc>
             </a:pPr>
             <a:r>
-              <a:rPr sz="2550" b="0" spc="-51">
+              <a:rPr sz="1700" b="0" spc="-34">
                 <a:solidFill>
                   <a:srgbClr val="000B1C"/>
                 </a:solidFill>
@@ -22057,7 +22057,7 @@
               </a:lnSpc>
             </a:pPr>
             <a:r>
-              <a:rPr sz="1950" b="0">
+              <a:rPr sz="1300" b="0">
                 <a:solidFill>
                   <a:srgbClr val="2A323D"/>
                 </a:solidFill>
@@ -22140,7 +22140,7 @@
               </a:lnSpc>
             </a:pPr>
             <a:r>
-              <a:rPr sz="1650" b="0" spc="231">
+              <a:rPr sz="1100" b="0" spc="154">
                 <a:solidFill>
                   <a:srgbClr val="ED6D24"/>
                 </a:solidFill>
@@ -22179,7 +22179,7 @@
               </a:lnSpc>
             </a:pPr>
             <a:r>
-              <a:rPr sz="2550" b="0" spc="-51">
+              <a:rPr sz="1700" b="0" spc="-34">
                 <a:solidFill>
                   <a:srgbClr val="000B1C"/>
                 </a:solidFill>
@@ -22218,7 +22218,7 @@
               </a:lnSpc>
             </a:pPr>
             <a:r>
-              <a:rPr sz="1950" b="0">
+              <a:rPr sz="1300" b="0">
                 <a:solidFill>
                   <a:srgbClr val="2A323D"/>
                 </a:solidFill>
@@ -22301,7 +22301,7 @@
               </a:lnSpc>
             </a:pPr>
             <a:r>
-              <a:rPr sz="1650" b="0" spc="231">
+              <a:rPr sz="1100" b="0" spc="154">
                 <a:solidFill>
                   <a:srgbClr val="ED6D24"/>
                 </a:solidFill>
@@ -22340,7 +22340,7 @@
               </a:lnSpc>
             </a:pPr>
             <a:r>
-              <a:rPr sz="2550" b="0" spc="-51">
+              <a:rPr sz="1700" b="0" spc="-34">
                 <a:solidFill>
                   <a:srgbClr val="000B1C"/>
                 </a:solidFill>
@@ -22379,7 +22379,7 @@
               </a:lnSpc>
             </a:pPr>
             <a:r>
-              <a:rPr sz="1950" b="0">
+              <a:rPr sz="1300" b="0">
                 <a:solidFill>
                   <a:srgbClr val="2A323D"/>
                 </a:solidFill>
@@ -22462,7 +22462,7 @@
               </a:lnSpc>
             </a:pPr>
             <a:r>
-              <a:rPr sz="1650" b="0" spc="231">
+              <a:rPr sz="1100" b="0" spc="154">
                 <a:solidFill>
                   <a:srgbClr val="ED6D24"/>
                 </a:solidFill>
@@ -22501,7 +22501,7 @@
               </a:lnSpc>
             </a:pPr>
             <a:r>
-              <a:rPr sz="2550" b="0" spc="-51">
+              <a:rPr sz="1700" b="0" spc="-34">
                 <a:solidFill>
                   <a:srgbClr val="000B1C"/>
                 </a:solidFill>
@@ -22540,7 +22540,7 @@
               </a:lnSpc>
             </a:pPr>
             <a:r>
-              <a:rPr sz="1950" b="0">
+              <a:rPr sz="1300" b="0">
                 <a:solidFill>
                   <a:srgbClr val="2A323D"/>
                 </a:solidFill>
@@ -22579,7 +22579,7 @@
               </a:lnSpc>
             </a:pPr>
             <a:r>
-              <a:rPr sz="1650" b="0" spc="231">
+              <a:rPr sz="1100" b="0" spc="154">
                 <a:solidFill>
                   <a:srgbClr val="5C6470"/>
                 </a:solidFill>
@@ -22618,7 +22618,7 @@
               </a:lnSpc>
             </a:pPr>
             <a:r>
-              <a:rPr sz="1650" b="0" spc="231">
+              <a:rPr sz="1100" b="0" spc="154">
                 <a:solidFill>
                   <a:srgbClr val="5C6470"/>
                 </a:solidFill>
@@ -22707,7 +22707,7 @@
               </a:lnSpc>
             </a:pPr>
             <a:r>
-              <a:rPr sz="1800" b="0" spc="252">
+              <a:rPr sz="1200" b="0" spc="168">
                 <a:solidFill>
                   <a:srgbClr val="000B1C"/>
                 </a:solidFill>
@@ -22746,7 +22746,7 @@
               </a:lnSpc>
             </a:pPr>
             <a:r>
-              <a:rPr sz="9750" b="0" spc="-439">
+              <a:rPr sz="6500" b="0" spc="-292">
                 <a:solidFill>
                   <a:srgbClr val="000B1C"/>
                 </a:solidFill>
@@ -22785,7 +22785,7 @@
               </a:lnSpc>
             </a:pPr>
             <a:r>
-              <a:rPr sz="2100" b="0" spc="294">
+              <a:rPr sz="1400" b="0" spc="196">
                 <a:solidFill>
                   <a:srgbClr val="000B1C"/>
                 </a:solidFill>
@@ -22824,7 +22824,7 @@
               </a:lnSpc>
             </a:pPr>
             <a:r>
-              <a:rPr sz="1650" b="0" spc="231">
+              <a:rPr sz="1100" b="0" spc="154">
                 <a:solidFill>
                   <a:srgbClr val="5C6470"/>
                 </a:solidFill>
@@ -22863,7 +22863,7 @@
               </a:lnSpc>
             </a:pPr>
             <a:r>
-              <a:rPr sz="1650" b="0" spc="231">
+              <a:rPr sz="1100" b="0" spc="154">
                 <a:solidFill>
                   <a:srgbClr val="5C6470"/>
                 </a:solidFill>
@@ -22928,7 +22928,7 @@
               </a:lnSpc>
             </a:pPr>
             <a:r>
-              <a:rPr sz="1800" b="0" spc="252">
+              <a:rPr sz="1200" b="0" spc="168">
                 <a:solidFill>
                   <a:srgbClr val="000B1C"/>
                 </a:solidFill>
@@ -22967,7 +22967,7 @@
               </a:lnSpc>
             </a:pPr>
             <a:r>
-              <a:rPr sz="7200" b="0" spc="-288">
+              <a:rPr sz="4800" b="0" spc="-192">
                 <a:solidFill>
                   <a:srgbClr val="000B1C"/>
                 </a:solidFill>
@@ -23006,7 +23006,7 @@
               </a:lnSpc>
             </a:pPr>
             <a:r>
-              <a:rPr sz="6300" b="0" spc="-220">
+              <a:rPr sz="4200" b="0" spc="-147">
                 <a:solidFill>
                   <a:srgbClr val="000B1C"/>
                 </a:solidFill>
@@ -23045,7 +23045,7 @@
               </a:lnSpc>
             </a:pPr>
             <a:r>
-              <a:rPr sz="2550" b="0">
+              <a:rPr sz="1700" b="0">
                 <a:solidFill>
                   <a:srgbClr val="000B1C"/>
                 </a:solidFill>
@@ -23054,7 +23054,7 @@
               <a:t>Define "chair" so that a machine could apply it, with no judgement of its own. One sentence: </a:t>
             </a:r>
             <a:r>
-              <a:rPr sz="2550" b="1">
+              <a:rPr sz="1700" b="1">
                 <a:solidFill>
                   <a:srgbClr val="000B1C"/>
                 </a:solidFill>
@@ -23069,11 +23069,11 @@
                 <a:spcPct val="109300"/>
               </a:lnSpc>
               <a:spcBef>
-                <a:spcPts val="1350"/>
+                <a:spcPts val="900"/>
               </a:spcBef>
             </a:pPr>
             <a:r>
-              <a:rPr sz="2550" b="0">
+              <a:rPr sz="1700" b="0">
                 <a:solidFill>
                   <a:srgbClr val="000B1C"/>
                 </a:solidFill>
@@ -23112,7 +23112,7 @@
               </a:lnSpc>
             </a:pPr>
             <a:r>
-              <a:rPr sz="1650" b="0" spc="231">
+              <a:rPr sz="1100" b="0" spc="154">
                 <a:solidFill>
                   <a:srgbClr val="5C6470"/>
                 </a:solidFill>
@@ -23151,7 +23151,7 @@
               </a:lnSpc>
             </a:pPr>
             <a:r>
-              <a:rPr sz="1650" b="0" spc="231">
+              <a:rPr sz="1100" b="0" spc="154">
                 <a:solidFill>
                   <a:srgbClr val="5C6470"/>
                 </a:solidFill>
@@ -23216,7 +23216,7 @@
               </a:lnSpc>
             </a:pPr>
             <a:r>
-              <a:rPr sz="1800" b="0" spc="252">
+              <a:rPr sz="1200" b="0" spc="168">
                 <a:solidFill>
                   <a:srgbClr val="000B1C"/>
                 </a:solidFill>
@@ -23255,7 +23255,7 @@
               </a:lnSpc>
             </a:pPr>
             <a:r>
-              <a:rPr sz="7200" b="0" spc="-288">
+              <a:rPr sz="4800" b="0" spc="-192">
                 <a:solidFill>
                   <a:srgbClr val="000B1C"/>
                 </a:solidFill>
@@ -23294,7 +23294,7 @@
               </a:lnSpc>
             </a:pPr>
             <a:r>
-              <a:rPr sz="6300" b="0" spc="-220">
+              <a:rPr sz="4200" b="0" spc="-147">
                 <a:solidFill>
                   <a:srgbClr val="000B1C"/>
                 </a:solidFill>
@@ -23333,7 +23333,7 @@
               </a:lnSpc>
             </a:pPr>
             <a:r>
-              <a:rPr sz="2550" b="0">
+              <a:rPr sz="1700" b="0">
                 <a:solidFill>
                   <a:srgbClr val="000B1C"/>
                 </a:solidFill>
@@ -23342,7 +23342,7 @@
               <a:t>Swap sentences with your neighbour. Find </a:t>
             </a:r>
             <a:r>
-              <a:rPr sz="2550" b="1">
+              <a:rPr sz="1700" b="1">
                 <a:solidFill>
                   <a:srgbClr val="000B1C"/>
                 </a:solidFill>
@@ -23351,7 +23351,7 @@
               <a:t>one thing that passes their rule and is not a chair</a:t>
             </a:r>
             <a:r>
-              <a:rPr sz="2550" b="0">
+              <a:rPr sz="1700" b="0">
                 <a:solidFill>
                   <a:srgbClr val="000B1C"/>
                 </a:solidFill>
@@ -23360,7 +23360,7 @@
               <a:t>, and </a:t>
             </a:r>
             <a:r>
-              <a:rPr sz="2550" b="1">
+              <a:rPr sz="1700" b="1">
                 <a:solidFill>
                   <a:srgbClr val="000B1C"/>
                 </a:solidFill>
@@ -23375,11 +23375,11 @@
                 <a:spcPct val="109300"/>
               </a:lnSpc>
               <a:spcBef>
-                <a:spcPts val="1350"/>
+                <a:spcPts val="900"/>
               </a:spcBef>
             </a:pPr>
             <a:r>
-              <a:rPr sz="2550" b="0">
+              <a:rPr sz="1700" b="0">
                 <a:solidFill>
                   <a:srgbClr val="000B1C"/>
                 </a:solidFill>
@@ -23418,7 +23418,7 @@
               </a:lnSpc>
             </a:pPr>
             <a:r>
-              <a:rPr sz="1650" b="0" spc="231">
+              <a:rPr sz="1100" b="0" spc="154">
                 <a:solidFill>
                   <a:srgbClr val="5C6470"/>
                 </a:solidFill>
@@ -23457,7 +23457,7 @@
               </a:lnSpc>
             </a:pPr>
             <a:r>
-              <a:rPr sz="1650" b="0" spc="231">
+              <a:rPr sz="1100" b="0" spc="154">
                 <a:solidFill>
                   <a:srgbClr val="5C6470"/>
                 </a:solidFill>
@@ -23522,7 +23522,7 @@
               </a:lnSpc>
             </a:pPr>
             <a:r>
-              <a:rPr sz="1800" b="0" spc="252">
+              <a:rPr sz="1200" b="0" spc="168">
                 <a:solidFill>
                   <a:srgbClr val="000B1C"/>
                 </a:solidFill>
@@ -23561,7 +23561,7 @@
               </a:lnSpc>
             </a:pPr>
             <a:r>
-              <a:rPr sz="7200" b="0" spc="-288">
+              <a:rPr sz="4800" b="0" spc="-192">
                 <a:solidFill>
                   <a:srgbClr val="000B1C"/>
                 </a:solidFill>
@@ -23600,7 +23600,7 @@
               </a:lnSpc>
             </a:pPr>
             <a:r>
-              <a:rPr sz="6300" b="0" spc="-220">
+              <a:rPr sz="4200" b="0" spc="-147">
                 <a:solidFill>
                   <a:srgbClr val="000B1C"/>
                 </a:solidFill>
@@ -23639,7 +23639,7 @@
               </a:lnSpc>
             </a:pPr>
             <a:r>
-              <a:rPr sz="2550" b="0">
+              <a:rPr sz="1700" b="0">
                 <a:solidFill>
                   <a:srgbClr val="000B1C"/>
                 </a:solidFill>
@@ -23648,7 +23648,7 @@
               <a:t>Join the pair behind you. Four people, one machine. Pick the </a:t>
             </a:r>
             <a:r>
-              <a:rPr sz="2550" b="1">
+              <a:rPr sz="1700" b="1">
                 <a:solidFill>
                   <a:srgbClr val="000B1C"/>
                 </a:solidFill>
@@ -23657,7 +23657,7 @@
               <a:t>five photographs</a:t>
             </a:r>
             <a:r>
-              <a:rPr sz="2550" b="0">
+              <a:rPr sz="1700" b="0">
                 <a:solidFill>
                   <a:srgbClr val="000B1C"/>
                 </a:solidFill>
@@ -23666,7 +23666,7 @@
               <a:t> you would show it to teach "chair". Then one </a:t>
             </a:r>
             <a:r>
-              <a:rPr sz="2550" b="1">
+              <a:rPr sz="1700" b="1">
                 <a:solidFill>
                   <a:srgbClr val="000B1C"/>
                 </a:solidFill>
@@ -23675,7 +23675,7 @@
               <a:t>hard no</a:t>
             </a:r>
             <a:r>
-              <a:rPr sz="2550" b="0">
+              <a:rPr sz="1700" b="0">
                 <a:solidFill>
                   <a:srgbClr val="000B1C"/>
                 </a:solidFill>
@@ -23690,11 +23690,11 @@
                 <a:spcPct val="109300"/>
               </a:lnSpc>
               <a:spcBef>
-                <a:spcPts val="1350"/>
+                <a:spcPts val="900"/>
               </a:spcBef>
             </a:pPr>
             <a:r>
-              <a:rPr sz="2550" b="0">
+              <a:rPr sz="1700" b="0">
                 <a:solidFill>
                   <a:srgbClr val="000B1C"/>
                 </a:solidFill>
@@ -23733,7 +23733,7 @@
               </a:lnSpc>
             </a:pPr>
             <a:r>
-              <a:rPr sz="1650" b="0" spc="231">
+              <a:rPr sz="1100" b="0" spc="154">
                 <a:solidFill>
                   <a:srgbClr val="5C6470"/>
                 </a:solidFill>
@@ -23772,7 +23772,7 @@
               </a:lnSpc>
             </a:pPr>
             <a:r>
-              <a:rPr sz="1650" b="0" spc="231">
+              <a:rPr sz="1100" b="0" spc="154">
                 <a:solidFill>
                   <a:srgbClr val="5C6470"/>
                 </a:solidFill>
@@ -23837,7 +23837,7 @@
               </a:lnSpc>
             </a:pPr>
             <a:r>
-              <a:rPr sz="1800" b="0" spc="252">
+              <a:rPr sz="1200" b="0" spc="168">
                 <a:solidFill>
                   <a:srgbClr val="5C6470"/>
                 </a:solidFill>
@@ -23876,7 +23876,7 @@
               </a:lnSpc>
             </a:pPr>
             <a:r>
-              <a:rPr sz="8250" b="0" spc="-330">
+              <a:rPr sz="5500" b="0" spc="-220">
                 <a:solidFill>
                   <a:srgbClr val="000B1C"/>
                 </a:solidFill>
@@ -23915,7 +23915,7 @@
               </a:lnSpc>
             </a:pPr>
             <a:r>
-              <a:rPr sz="2400" b="0">
+              <a:rPr sz="1600" b="0">
                 <a:solidFill>
                   <a:srgbClr val="5C6470"/>
                 </a:solidFill>
@@ -23954,7 +23954,7 @@
               </a:lnSpc>
             </a:pPr>
             <a:r>
-              <a:rPr sz="1800" b="0">
+              <a:rPr sz="1200" b="0">
                 <a:solidFill>
                   <a:srgbClr val="5C6470"/>
                 </a:solidFill>
@@ -23993,7 +23993,7 @@
               </a:lnSpc>
             </a:pPr>
             <a:r>
-              <a:rPr sz="1650" b="0" spc="231">
+              <a:rPr sz="1100" b="0" spc="154">
                 <a:solidFill>
                   <a:srgbClr val="5C6470"/>
                 </a:solidFill>
@@ -24032,7 +24032,7 @@
               </a:lnSpc>
             </a:pPr>
             <a:r>
-              <a:rPr sz="1650" b="0" spc="231">
+              <a:rPr sz="1100" b="0" spc="154">
                 <a:solidFill>
                   <a:srgbClr val="5C6470"/>
                 </a:solidFill>
@@ -24121,7 +24121,7 @@
               </a:lnSpc>
             </a:pPr>
             <a:r>
-              <a:rPr sz="1800" b="0" spc="252">
+              <a:rPr sz="1200" b="0" spc="168">
                 <a:solidFill>
                   <a:srgbClr val="5C6470"/>
                 </a:solidFill>
@@ -24160,7 +24160,7 @@
               </a:lnSpc>
             </a:pPr>
             <a:r>
-              <a:rPr sz="5400" b="0" spc="-162">
+              <a:rPr sz="3600" b="0" spc="-108">
                 <a:solidFill>
                   <a:srgbClr val="000B1C"/>
                 </a:solidFill>
@@ -24199,7 +24199,7 @@
               </a:lnSpc>
             </a:pPr>
             <a:r>
-              <a:rPr sz="2550" b="0">
+              <a:rPr sz="1700" b="0">
                 <a:solidFill>
                   <a:srgbClr val="2A323D"/>
                 </a:solidFill>
@@ -24214,11 +24214,11 @@
                 <a:spcPct val="113300"/>
               </a:lnSpc>
               <a:spcBef>
-                <a:spcPts val="1350"/>
+                <a:spcPts val="900"/>
               </a:spcBef>
             </a:pPr>
             <a:r>
-              <a:rPr sz="2550" b="0">
+              <a:rPr sz="1700" b="0">
                 <a:solidFill>
                   <a:srgbClr val="2A323D"/>
                 </a:solidFill>
@@ -24233,11 +24233,11 @@
                 <a:spcPct val="113300"/>
               </a:lnSpc>
               <a:spcBef>
-                <a:spcPts val="1350"/>
+                <a:spcPts val="900"/>
               </a:spcBef>
             </a:pPr>
             <a:r>
-              <a:rPr sz="2550" b="0">
+              <a:rPr sz="1700" b="0">
                 <a:solidFill>
                   <a:srgbClr val="2A323D"/>
                 </a:solidFill>
@@ -24252,11 +24252,11 @@
                 <a:spcPct val="113300"/>
               </a:lnSpc>
               <a:spcBef>
-                <a:spcPts val="1350"/>
+                <a:spcPts val="900"/>
               </a:spcBef>
             </a:pPr>
             <a:r>
-              <a:rPr sz="2550" b="1">
+              <a:rPr sz="1700" b="1">
                 <a:solidFill>
                   <a:srgbClr val="2A323D"/>
                 </a:solidFill>
@@ -24295,7 +24295,7 @@
               </a:lnSpc>
             </a:pPr>
             <a:r>
-              <a:rPr sz="1650" b="0" spc="231">
+              <a:rPr sz="1100" b="0" spc="154">
                 <a:solidFill>
                   <a:srgbClr val="5C6470"/>
                 </a:solidFill>
@@ -24334,7 +24334,7 @@
               </a:lnSpc>
             </a:pPr>
             <a:r>
-              <a:rPr sz="1650" b="0" spc="231">
+              <a:rPr sz="1100" b="0" spc="154">
                 <a:solidFill>
                   <a:srgbClr val="5C6470"/>
                 </a:solidFill>
@@ -24423,7 +24423,7 @@
               </a:lnSpc>
             </a:pPr>
             <a:r>
-              <a:rPr sz="1800" b="0" spc="252">
+              <a:rPr sz="1200" b="0" spc="168">
                 <a:solidFill>
                   <a:srgbClr val="5C6470"/>
                 </a:solidFill>
@@ -24462,7 +24462,7 @@
               </a:lnSpc>
             </a:pPr>
             <a:r>
-              <a:rPr sz="5400" b="0" spc="-162">
+              <a:rPr sz="3600" b="0" spc="-108">
                 <a:solidFill>
                   <a:srgbClr val="000B1C"/>
                 </a:solidFill>
@@ -24545,7 +24545,7 @@
               </a:lnSpc>
             </a:pPr>
             <a:r>
-              <a:rPr sz="1650" b="0" spc="231">
+              <a:rPr sz="1100" b="0" spc="154">
                 <a:solidFill>
                   <a:srgbClr val="ED6D24"/>
                 </a:solidFill>
@@ -24584,7 +24584,7 @@
               </a:lnSpc>
             </a:pPr>
             <a:r>
-              <a:rPr sz="3000" b="0" spc="-60">
+              <a:rPr sz="2000" b="0" spc="-40">
                 <a:solidFill>
                   <a:srgbClr val="000B1C"/>
                 </a:solidFill>
@@ -24623,7 +24623,7 @@
               </a:lnSpc>
             </a:pPr>
             <a:r>
-              <a:rPr sz="2250" b="0">
+              <a:rPr sz="1500" b="0">
                 <a:solidFill>
                   <a:srgbClr val="2A323D"/>
                 </a:solidFill>
@@ -24706,7 +24706,7 @@
               </a:lnSpc>
             </a:pPr>
             <a:r>
-              <a:rPr sz="1650" b="0" spc="231">
+              <a:rPr sz="1100" b="0" spc="154">
                 <a:solidFill>
                   <a:srgbClr val="ED6D24"/>
                 </a:solidFill>
@@ -24745,7 +24745,7 @@
               </a:lnSpc>
             </a:pPr>
             <a:r>
-              <a:rPr sz="3000" b="0" spc="-60">
+              <a:rPr sz="2000" b="0" spc="-40">
                 <a:solidFill>
                   <a:srgbClr val="000B1C"/>
                 </a:solidFill>
@@ -24784,7 +24784,7 @@
               </a:lnSpc>
             </a:pPr>
             <a:r>
-              <a:rPr sz="2250" b="0">
+              <a:rPr sz="1500" b="0">
                 <a:solidFill>
                   <a:srgbClr val="2A323D"/>
                 </a:solidFill>
@@ -24867,7 +24867,7 @@
               </a:lnSpc>
             </a:pPr>
             <a:r>
-              <a:rPr sz="1650" b="0" spc="231">
+              <a:rPr sz="1100" b="0" spc="154">
                 <a:solidFill>
                   <a:srgbClr val="ED6D24"/>
                 </a:solidFill>
@@ -24906,7 +24906,7 @@
               </a:lnSpc>
             </a:pPr>
             <a:r>
-              <a:rPr sz="3000" b="0" spc="-60">
+              <a:rPr sz="2000" b="0" spc="-40">
                 <a:solidFill>
                   <a:srgbClr val="000B1C"/>
                 </a:solidFill>
@@ -24945,7 +24945,7 @@
               </a:lnSpc>
             </a:pPr>
             <a:r>
-              <a:rPr sz="2250" b="0">
+              <a:rPr sz="1500" b="0">
                 <a:solidFill>
                   <a:srgbClr val="2A323D"/>
                 </a:solidFill>
@@ -24984,7 +24984,7 @@
               </a:lnSpc>
             </a:pPr>
             <a:r>
-              <a:rPr sz="1650" b="0" spc="231">
+              <a:rPr sz="1100" b="0" spc="154">
                 <a:solidFill>
                   <a:srgbClr val="5C6470"/>
                 </a:solidFill>
@@ -25023,7 +25023,7 @@
               </a:lnSpc>
             </a:pPr>
             <a:r>
-              <a:rPr sz="1650" b="0" spc="231">
+              <a:rPr sz="1100" b="0" spc="154">
                 <a:solidFill>
                   <a:srgbClr val="5C6470"/>
                 </a:solidFill>
@@ -25112,7 +25112,7 @@
               </a:lnSpc>
             </a:pPr>
             <a:r>
-              <a:rPr sz="1800" b="0" spc="252">
+              <a:rPr sz="1200" b="0" spc="168">
                 <a:solidFill>
                   <a:srgbClr val="F2ECF5"/>
                 </a:solidFill>
@@ -25151,7 +25151,7 @@
               </a:lnSpc>
             </a:pPr>
             <a:r>
-              <a:rPr sz="9750" b="0" spc="-439">
+              <a:rPr sz="6500" b="0" spc="-292">
                 <a:solidFill>
                   <a:srgbClr val="FFFFFF"/>
                 </a:solidFill>
@@ -25190,7 +25190,7 @@
               </a:lnSpc>
             </a:pPr>
             <a:r>
-              <a:rPr sz="2100" b="0" spc="294">
+              <a:rPr sz="1400" b="0" spc="196">
                 <a:solidFill>
                   <a:srgbClr val="F2ECF5"/>
                 </a:solidFill>
@@ -25229,7 +25229,7 @@
               </a:lnSpc>
             </a:pPr>
             <a:r>
-              <a:rPr sz="1650" b="0" spc="231">
+              <a:rPr sz="1100" b="0" spc="154">
                 <a:solidFill>
                   <a:srgbClr val="B3B7BE"/>
                 </a:solidFill>
@@ -25268,7 +25268,7 @@
               </a:lnSpc>
             </a:pPr>
             <a:r>
-              <a:rPr sz="1650" b="0" spc="231">
+              <a:rPr sz="1100" b="0" spc="154">
                 <a:solidFill>
                   <a:srgbClr val="B3B7BE"/>
                 </a:solidFill>
@@ -25333,7 +25333,7 @@
               </a:lnSpc>
             </a:pPr>
             <a:r>
-              <a:rPr sz="1800" b="0" spc="252">
+              <a:rPr sz="1200" b="0" spc="168">
                 <a:solidFill>
                   <a:srgbClr val="5C6470"/>
                 </a:solidFill>
@@ -25372,7 +25372,7 @@
               </a:lnSpc>
             </a:pPr>
             <a:r>
-              <a:rPr sz="5400" b="0" spc="-162">
+              <a:rPr sz="3600" b="0" spc="-108">
                 <a:solidFill>
                   <a:srgbClr val="000B1C"/>
                 </a:solidFill>
@@ -25455,7 +25455,7 @@
               </a:lnSpc>
             </a:pPr>
             <a:r>
-              <a:rPr sz="6600" b="0" spc="-264">
+              <a:rPr sz="4400" b="0" spc="-176">
                 <a:solidFill>
                   <a:srgbClr val="000B1C"/>
                 </a:solidFill>
@@ -25494,7 +25494,7 @@
               </a:lnSpc>
             </a:pPr>
             <a:r>
-              <a:rPr sz="2250" b="0" spc="-45">
+              <a:rPr sz="1500" b="0" spc="-30">
                 <a:solidFill>
                   <a:srgbClr val="000B1C"/>
                 </a:solidFill>
@@ -25533,7 +25533,7 @@
               </a:lnSpc>
             </a:pPr>
             <a:r>
-              <a:rPr sz="1800" b="0">
+              <a:rPr sz="1200" b="0">
                 <a:solidFill>
                   <a:srgbClr val="2A323D"/>
                 </a:solidFill>
@@ -25616,7 +25616,7 @@
               </a:lnSpc>
             </a:pPr>
             <a:r>
-              <a:rPr sz="6600" b="0" spc="-264">
+              <a:rPr sz="4400" b="0" spc="-176">
                 <a:solidFill>
                   <a:srgbClr val="000B1C"/>
                 </a:solidFill>
@@ -25655,7 +25655,7 @@
               </a:lnSpc>
             </a:pPr>
             <a:r>
-              <a:rPr sz="2250" b="0" spc="-45">
+              <a:rPr sz="1500" b="0" spc="-30">
                 <a:solidFill>
                   <a:srgbClr val="000B1C"/>
                 </a:solidFill>
@@ -25694,7 +25694,7 @@
               </a:lnSpc>
             </a:pPr>
             <a:r>
-              <a:rPr sz="1800" b="0">
+              <a:rPr sz="1200" b="0">
                 <a:solidFill>
                   <a:srgbClr val="2A323D"/>
                 </a:solidFill>
@@ -25777,7 +25777,7 @@
               </a:lnSpc>
             </a:pPr>
             <a:r>
-              <a:rPr sz="6600" b="0" spc="-264">
+              <a:rPr sz="4400" b="0" spc="-176">
                 <a:solidFill>
                   <a:srgbClr val="000B1C"/>
                 </a:solidFill>
@@ -25816,7 +25816,7 @@
               </a:lnSpc>
             </a:pPr>
             <a:r>
-              <a:rPr sz="2250" b="0" spc="-45">
+              <a:rPr sz="1500" b="0" spc="-30">
                 <a:solidFill>
                   <a:srgbClr val="000B1C"/>
                 </a:solidFill>
@@ -25855,7 +25855,7 @@
               </a:lnSpc>
             </a:pPr>
             <a:r>
-              <a:rPr sz="1800" b="0">
+              <a:rPr sz="1200" b="0">
                 <a:solidFill>
                   <a:srgbClr val="2A323D"/>
                 </a:solidFill>
@@ -25938,7 +25938,7 @@
               </a:lnSpc>
             </a:pPr>
             <a:r>
-              <a:rPr sz="6600" b="0" spc="-264">
+              <a:rPr sz="4400" b="0" spc="-176">
                 <a:solidFill>
                   <a:srgbClr val="ED6D24"/>
                 </a:solidFill>
@@ -25977,7 +25977,7 @@
               </a:lnSpc>
             </a:pPr>
             <a:r>
-              <a:rPr sz="2250" b="0" spc="-45">
+              <a:rPr sz="1500" b="0" spc="-30">
                 <a:solidFill>
                   <a:srgbClr val="000B1C"/>
                 </a:solidFill>
@@ -26016,7 +26016,7 @@
               </a:lnSpc>
             </a:pPr>
             <a:r>
-              <a:rPr sz="1800" b="0">
+              <a:rPr sz="1200" b="0">
                 <a:solidFill>
                   <a:srgbClr val="2A323D"/>
                 </a:solidFill>
@@ -26099,7 +26099,7 @@
               </a:lnSpc>
             </a:pPr>
             <a:r>
-              <a:rPr sz="6600" b="0" spc="-264">
+              <a:rPr sz="4400" b="0" spc="-176">
                 <a:solidFill>
                   <a:srgbClr val="000B1C"/>
                 </a:solidFill>
@@ -26138,7 +26138,7 @@
               </a:lnSpc>
             </a:pPr>
             <a:r>
-              <a:rPr sz="2250" b="0" spc="-45">
+              <a:rPr sz="1500" b="0" spc="-30">
                 <a:solidFill>
                   <a:srgbClr val="000B1C"/>
                 </a:solidFill>
@@ -26177,7 +26177,7 @@
               </a:lnSpc>
             </a:pPr>
             <a:r>
-              <a:rPr sz="1800" b="0">
+              <a:rPr sz="1200" b="0">
                 <a:solidFill>
                   <a:srgbClr val="2A323D"/>
                 </a:solidFill>
@@ -26216,7 +26216,7 @@
               </a:lnSpc>
             </a:pPr>
             <a:r>
-              <a:rPr sz="1650" b="0" spc="231">
+              <a:rPr sz="1100" b="0" spc="154">
                 <a:solidFill>
                   <a:srgbClr val="5C6470"/>
                 </a:solidFill>
@@ -26255,7 +26255,7 @@
               </a:lnSpc>
             </a:pPr>
             <a:r>
-              <a:rPr sz="1650" b="0" spc="231">
+              <a:rPr sz="1100" b="0" spc="154">
                 <a:solidFill>
                   <a:srgbClr val="5C6470"/>
                 </a:solidFill>
@@ -26344,7 +26344,7 @@
               </a:lnSpc>
             </a:pPr>
             <a:r>
-              <a:rPr sz="1800" b="0" spc="252">
+              <a:rPr sz="1200" b="0" spc="168">
                 <a:solidFill>
                   <a:srgbClr val="5C6470"/>
                 </a:solidFill>
@@ -26383,7 +26383,7 @@
               </a:lnSpc>
             </a:pPr>
             <a:r>
-              <a:rPr sz="5400" b="0" spc="-162">
+              <a:rPr sz="3600" b="0" spc="-108">
                 <a:solidFill>
                   <a:srgbClr val="000B1C"/>
                 </a:solidFill>
@@ -26422,7 +26422,7 @@
               </a:lnSpc>
             </a:pPr>
             <a:r>
-              <a:rPr sz="2400" b="1">
+              <a:rPr sz="1600" b="1">
                 <a:solidFill>
                   <a:srgbClr val="2A323D"/>
                 </a:solidFill>
@@ -26431,7 +26431,7 @@
               <a:t>Topic:</a:t>
             </a:r>
             <a:r>
-              <a:rPr sz="2400" b="0">
+              <a:rPr sz="1600" b="0">
                 <a:solidFill>
                   <a:srgbClr val="2A323D"/>
                 </a:solidFill>
@@ -26446,7 +26446,7 @@
                 <a:spcPct val="114900"/>
               </a:lnSpc>
               <a:spcBef>
-                <a:spcPts val="1350"/>
+                <a:spcPts val="900"/>
               </a:spcBef>
               <a:buClr>
                 <a:srgbClr val="ED6D24"/>
@@ -26455,7 +26455,7 @@
               <a:buChar char="·"/>
             </a:pPr>
             <a:r>
-              <a:rPr sz="2400" b="0">
+              <a:rPr sz="1600" b="0">
                 <a:solidFill>
                   <a:srgbClr val="2A323D"/>
                 </a:solidFill>
@@ -26470,7 +26470,7 @@
                 <a:spcPct val="114900"/>
               </a:lnSpc>
               <a:spcBef>
-                <a:spcPts val="1350"/>
+                <a:spcPts val="900"/>
               </a:spcBef>
               <a:buClr>
                 <a:srgbClr val="ED6D24"/>
@@ -26479,7 +26479,7 @@
               <a:buChar char="·"/>
             </a:pPr>
             <a:r>
-              <a:rPr sz="2400" b="0">
+              <a:rPr sz="1600" b="0">
                 <a:solidFill>
                   <a:srgbClr val="2A323D"/>
                 </a:solidFill>
@@ -26494,7 +26494,7 @@
                 <a:spcPct val="114900"/>
               </a:lnSpc>
               <a:spcBef>
-                <a:spcPts val="1350"/>
+                <a:spcPts val="900"/>
               </a:spcBef>
               <a:buClr>
                 <a:srgbClr val="ED6D24"/>
@@ -26503,7 +26503,7 @@
               <a:buChar char="·"/>
             </a:pPr>
             <a:r>
-              <a:rPr sz="2400" b="0">
+              <a:rPr sz="1600" b="0">
                 <a:solidFill>
                   <a:srgbClr val="2A323D"/>
                 </a:solidFill>
@@ -26512,7 +26512,7 @@
               <a:t>A short </a:t>
             </a:r>
             <a:r>
-              <a:rPr sz="2400" b="1">
+              <a:rPr sz="1600" b="1">
                 <a:solidFill>
                   <a:srgbClr val="2A323D"/>
                 </a:solidFill>
@@ -26521,7 +26521,7 @@
               <a:t>process note</a:t>
             </a:r>
             <a:r>
-              <a:rPr sz="2400" b="0">
+              <a:rPr sz="1600" b="0">
                 <a:solidFill>
                   <a:srgbClr val="2A323D"/>
                 </a:solidFill>
@@ -26536,11 +26536,11 @@
                 <a:spcPct val="114900"/>
               </a:lnSpc>
               <a:spcBef>
-                <a:spcPts val="1350"/>
+                <a:spcPts val="900"/>
               </a:spcBef>
             </a:pPr>
             <a:r>
-              <a:rPr sz="2400" b="0">
+              <a:rPr sz="1600" b="0">
                 <a:solidFill>
                   <a:srgbClr val="2A323D"/>
                 </a:solidFill>
@@ -26579,7 +26579,7 @@
               </a:lnSpc>
             </a:pPr>
             <a:r>
-              <a:rPr sz="1650" b="0" spc="231">
+              <a:rPr sz="1100" b="0" spc="154">
                 <a:solidFill>
                   <a:srgbClr val="5C6470"/>
                 </a:solidFill>
@@ -26618,7 +26618,7 @@
               </a:lnSpc>
             </a:pPr>
             <a:r>
-              <a:rPr sz="1650" b="0" spc="231">
+              <a:rPr sz="1100" b="0" spc="154">
                 <a:solidFill>
                   <a:srgbClr val="5C6470"/>
                 </a:solidFill>
@@ -26707,7 +26707,7 @@
               </a:lnSpc>
             </a:pPr>
             <a:r>
-              <a:rPr sz="1800" b="0" spc="252">
+              <a:rPr sz="1200" b="0" spc="168">
                 <a:solidFill>
                   <a:srgbClr val="5C6470"/>
                 </a:solidFill>
@@ -26746,7 +26746,7 @@
               </a:lnSpc>
             </a:pPr>
             <a:r>
-              <a:rPr sz="5400" b="0" spc="-162">
+              <a:rPr sz="3600" b="0" spc="-108">
                 <a:solidFill>
                   <a:srgbClr val="000B1C"/>
                 </a:solidFill>
@@ -26785,7 +26785,7 @@
               </a:lnSpc>
             </a:pPr>
             <a:r>
-              <a:rPr sz="2400" b="0">
+              <a:rPr sz="1600" b="0">
                 <a:solidFill>
                   <a:srgbClr val="2A323D"/>
                 </a:solidFill>
@@ -26794,7 +26794,7 @@
               <a:t>Teams of four to five, formed in week 7. A product or service in which a model </a:t>
             </a:r>
             <a:r>
-              <a:rPr sz="2400" b="1">
+              <a:rPr sz="1600" b="1">
                 <a:solidFill>
                   <a:srgbClr val="2A323D"/>
                 </a:solidFill>
@@ -26803,7 +26803,7 @@
               <a:t>decides something for each person</a:t>
             </a:r>
             <a:r>
-              <a:rPr sz="2400" b="0">
+              <a:rPr sz="1600" b="0">
                 <a:solidFill>
                   <a:srgbClr val="2A323D"/>
                 </a:solidFill>
@@ -26818,7 +26818,7 @@
                 <a:spcPct val="114900"/>
               </a:lnSpc>
               <a:spcBef>
-                <a:spcPts val="1350"/>
+                <a:spcPts val="900"/>
               </a:spcBef>
               <a:buClr>
                 <a:srgbClr val="ED6D24"/>
@@ -26827,7 +26827,7 @@
               <a:buChar char="·"/>
             </a:pPr>
             <a:r>
-              <a:rPr sz="2400" b="1">
+              <a:rPr sz="1600" b="1">
                 <a:solidFill>
                   <a:srgbClr val="2A323D"/>
                 </a:solidFill>
@@ -26836,7 +26836,7 @@
               <a:t>Poster, A0:</a:t>
             </a:r>
             <a:r>
-              <a:rPr sz="2400" b="0">
+              <a:rPr sz="1600" b="0">
                 <a:solidFill>
                   <a:srgbClr val="2A323D"/>
                 </a:solidFill>
@@ -26851,7 +26851,7 @@
                 <a:spcPct val="114900"/>
               </a:lnSpc>
               <a:spcBef>
-                <a:spcPts val="1350"/>
+                <a:spcPts val="900"/>
               </a:spcBef>
               <a:buClr>
                 <a:srgbClr val="ED6D24"/>
@@ -26860,7 +26860,7 @@
               <a:buChar char="·"/>
             </a:pPr>
             <a:r>
-              <a:rPr sz="2400" b="1">
+              <a:rPr sz="1600" b="1">
                 <a:solidFill>
                   <a:srgbClr val="2A323D"/>
                 </a:solidFill>
@@ -26869,7 +26869,7 @@
               <a:t>Video, 3–5 min:</a:t>
             </a:r>
             <a:r>
-              <a:rPr sz="2400" b="0">
+              <a:rPr sz="1600" b="0">
                 <a:solidFill>
                   <a:srgbClr val="2A323D"/>
                 </a:solidFill>
@@ -26884,7 +26884,7 @@
                 <a:spcPct val="114900"/>
               </a:lnSpc>
               <a:spcBef>
-                <a:spcPts val="1350"/>
+                <a:spcPts val="900"/>
               </a:spcBef>
               <a:buClr>
                 <a:srgbClr val="ED6D24"/>
@@ -26893,7 +26893,7 @@
               <a:buChar char="·"/>
             </a:pPr>
             <a:r>
-              <a:rPr sz="2400" b="1">
+              <a:rPr sz="1600" b="1">
                 <a:solidFill>
                   <a:srgbClr val="2A323D"/>
                 </a:solidFill>
@@ -26902,7 +26902,7 @@
               <a:t>Mediation brief, one page:</a:t>
             </a:r>
             <a:r>
-              <a:rPr sz="2400" b="0">
+              <a:rPr sz="1600" b="0">
                 <a:solidFill>
                   <a:srgbClr val="2A323D"/>
                 </a:solidFill>
@@ -26917,11 +26917,11 @@
                 <a:spcPct val="114900"/>
               </a:lnSpc>
               <a:spcBef>
-                <a:spcPts val="1350"/>
+                <a:spcPts val="900"/>
               </a:spcBef>
             </a:pPr>
             <a:r>
-              <a:rPr sz="2400" b="0">
+              <a:rPr sz="1600" b="0">
                 <a:solidFill>
                   <a:srgbClr val="2A323D"/>
                 </a:solidFill>
@@ -26960,7 +26960,7 @@
               </a:lnSpc>
             </a:pPr>
             <a:r>
-              <a:rPr sz="1650" b="0" spc="231">
+              <a:rPr sz="1100" b="0" spc="154">
                 <a:solidFill>
                   <a:srgbClr val="5C6470"/>
                 </a:solidFill>
@@ -26999,7 +26999,7 @@
               </a:lnSpc>
             </a:pPr>
             <a:r>
-              <a:rPr sz="1650" b="0" spc="231">
+              <a:rPr sz="1100" b="0" spc="154">
                 <a:solidFill>
                   <a:srgbClr val="5C6470"/>
                 </a:solidFill>
@@ -27088,7 +27088,7 @@
               </a:lnSpc>
             </a:pPr>
             <a:r>
-              <a:rPr sz="1800" b="0" spc="252">
+              <a:rPr sz="1200" b="0" spc="168">
                 <a:solidFill>
                   <a:srgbClr val="5C6470"/>
                 </a:solidFill>
@@ -27127,7 +27127,7 @@
               </a:lnSpc>
             </a:pPr>
             <a:r>
-              <a:rPr sz="5400" b="0" spc="-162">
+              <a:rPr sz="3600" b="0" spc="-108">
                 <a:solidFill>
                   <a:srgbClr val="000B1C"/>
                 </a:solidFill>
@@ -27210,7 +27210,7 @@
               </a:lnSpc>
             </a:pPr>
             <a:r>
-              <a:rPr sz="1650" b="0" spc="231">
+              <a:rPr sz="1100" b="0" spc="154">
                 <a:solidFill>
                   <a:srgbClr val="ED6D24"/>
                 </a:solidFill>
@@ -27249,7 +27249,7 @@
               </a:lnSpc>
             </a:pPr>
             <a:r>
-              <a:rPr sz="2250" b="0" spc="-45">
+              <a:rPr sz="1500" b="0" spc="-30">
                 <a:solidFill>
                   <a:srgbClr val="000B1C"/>
                 </a:solidFill>
@@ -27288,7 +27288,7 @@
               </a:lnSpc>
             </a:pPr>
             <a:r>
-              <a:rPr sz="1650" b="0">
+              <a:rPr sz="1100" b="0">
                 <a:solidFill>
                   <a:srgbClr val="2A323D"/>
                 </a:solidFill>
@@ -27371,7 +27371,7 @@
               </a:lnSpc>
             </a:pPr>
             <a:r>
-              <a:rPr sz="1650" b="0" spc="231">
+              <a:rPr sz="1100" b="0" spc="154">
                 <a:solidFill>
                   <a:srgbClr val="ED6D24"/>
                 </a:solidFill>
@@ -27410,7 +27410,7 @@
               </a:lnSpc>
             </a:pPr>
             <a:r>
-              <a:rPr sz="2250" b="0" spc="-45">
+              <a:rPr sz="1500" b="0" spc="-30">
                 <a:solidFill>
                   <a:srgbClr val="000B1C"/>
                 </a:solidFill>
@@ -27449,7 +27449,7 @@
               </a:lnSpc>
             </a:pPr>
             <a:r>
-              <a:rPr sz="1650" b="0">
+              <a:rPr sz="1100" b="0">
                 <a:solidFill>
                   <a:srgbClr val="2A323D"/>
                 </a:solidFill>
@@ -27532,7 +27532,7 @@
               </a:lnSpc>
             </a:pPr>
             <a:r>
-              <a:rPr sz="1650" b="0" spc="231">
+              <a:rPr sz="1100" b="0" spc="154">
                 <a:solidFill>
                   <a:srgbClr val="ED6D24"/>
                 </a:solidFill>
@@ -27571,7 +27571,7 @@
               </a:lnSpc>
             </a:pPr>
             <a:r>
-              <a:rPr sz="2250" b="0" spc="-45">
+              <a:rPr sz="1500" b="0" spc="-30">
                 <a:solidFill>
                   <a:srgbClr val="000B1C"/>
                 </a:solidFill>
@@ -27610,7 +27610,7 @@
               </a:lnSpc>
             </a:pPr>
             <a:r>
-              <a:rPr sz="1650" b="0">
+              <a:rPr sz="1100" b="0">
                 <a:solidFill>
                   <a:srgbClr val="2A323D"/>
                 </a:solidFill>
@@ -27693,7 +27693,7 @@
               </a:lnSpc>
             </a:pPr>
             <a:r>
-              <a:rPr sz="1650" b="0" spc="231">
+              <a:rPr sz="1100" b="0" spc="154">
                 <a:solidFill>
                   <a:srgbClr val="ED6D24"/>
                 </a:solidFill>
@@ -27732,7 +27732,7 @@
               </a:lnSpc>
             </a:pPr>
             <a:r>
-              <a:rPr sz="2250" b="0" spc="-45">
+              <a:rPr sz="1500" b="0" spc="-30">
                 <a:solidFill>
                   <a:srgbClr val="000B1C"/>
                 </a:solidFill>
@@ -27771,7 +27771,7 @@
               </a:lnSpc>
             </a:pPr>
             <a:r>
-              <a:rPr sz="1650" b="0">
+              <a:rPr sz="1100" b="0">
                 <a:solidFill>
                   <a:srgbClr val="2A323D"/>
                 </a:solidFill>
@@ -27854,7 +27854,7 @@
               </a:lnSpc>
             </a:pPr>
             <a:r>
-              <a:rPr sz="1650" b="0" spc="231">
+              <a:rPr sz="1100" b="0" spc="154">
                 <a:solidFill>
                   <a:srgbClr val="ED6D24"/>
                 </a:solidFill>
@@ -27893,7 +27893,7 @@
               </a:lnSpc>
             </a:pPr>
             <a:r>
-              <a:rPr sz="2250" b="0" spc="-45">
+              <a:rPr sz="1500" b="0" spc="-30">
                 <a:solidFill>
                   <a:srgbClr val="000B1C"/>
                 </a:solidFill>
@@ -27932,7 +27932,7 @@
               </a:lnSpc>
             </a:pPr>
             <a:r>
-              <a:rPr sz="1650" b="0">
+              <a:rPr sz="1100" b="0">
                 <a:solidFill>
                   <a:srgbClr val="2A323D"/>
                 </a:solidFill>
@@ -27971,7 +27971,7 @@
               </a:lnSpc>
             </a:pPr>
             <a:r>
-              <a:rPr sz="1650" b="0" spc="231">
+              <a:rPr sz="1100" b="0" spc="154">
                 <a:solidFill>
                   <a:srgbClr val="5C6470"/>
                 </a:solidFill>
@@ -28010,7 +28010,7 @@
               </a:lnSpc>
             </a:pPr>
             <a:r>
-              <a:rPr sz="1650" b="0" spc="231">
+              <a:rPr sz="1100" b="0" spc="154">
                 <a:solidFill>
                   <a:srgbClr val="5C6470"/>
                 </a:solidFill>
@@ -28099,7 +28099,7 @@
               </a:lnSpc>
             </a:pPr>
             <a:r>
-              <a:rPr sz="1800" b="0" spc="252">
+              <a:rPr sz="1200" b="0" spc="168">
                 <a:solidFill>
                   <a:srgbClr val="5C6470"/>
                 </a:solidFill>
@@ -28138,7 +28138,7 @@
               </a:lnSpc>
             </a:pPr>
             <a:r>
-              <a:rPr sz="5400" b="0" spc="-162">
+              <a:rPr sz="3600" b="0" spc="-108">
                 <a:solidFill>
                   <a:srgbClr val="000B1C"/>
                 </a:solidFill>
@@ -28221,7 +28221,7 @@
               </a:lnSpc>
             </a:pPr>
             <a:r>
-              <a:rPr sz="1650" b="0" spc="231">
+              <a:rPr sz="1100" b="0" spc="154">
                 <a:solidFill>
                   <a:srgbClr val="ED6D24"/>
                 </a:solidFill>
@@ -28260,7 +28260,7 @@
               </a:lnSpc>
             </a:pPr>
             <a:r>
-              <a:rPr sz="3000" b="0" spc="-60">
+              <a:rPr sz="2000" b="0" spc="-40">
                 <a:solidFill>
                   <a:srgbClr val="000B1C"/>
                 </a:solidFill>
@@ -28299,7 +28299,7 @@
               </a:lnSpc>
             </a:pPr>
             <a:r>
-              <a:rPr sz="2250" b="0">
+              <a:rPr sz="1500" b="0">
                 <a:solidFill>
                   <a:srgbClr val="2A323D"/>
                 </a:solidFill>
@@ -28382,7 +28382,7 @@
               </a:lnSpc>
             </a:pPr>
             <a:r>
-              <a:rPr sz="1650" b="0" spc="231">
+              <a:rPr sz="1100" b="0" spc="154">
                 <a:solidFill>
                   <a:srgbClr val="ED6D24"/>
                 </a:solidFill>
@@ -28421,7 +28421,7 @@
               </a:lnSpc>
             </a:pPr>
             <a:r>
-              <a:rPr sz="3000" b="0" spc="-60">
+              <a:rPr sz="2000" b="0" spc="-40">
                 <a:solidFill>
                   <a:srgbClr val="000B1C"/>
                 </a:solidFill>
@@ -28460,7 +28460,7 @@
               </a:lnSpc>
             </a:pPr>
             <a:r>
-              <a:rPr sz="2250" b="0">
+              <a:rPr sz="1500" b="0">
                 <a:solidFill>
                   <a:srgbClr val="2A323D"/>
                 </a:solidFill>
@@ -28543,7 +28543,7 @@
               </a:lnSpc>
             </a:pPr>
             <a:r>
-              <a:rPr sz="1650" b="0" spc="231">
+              <a:rPr sz="1100" b="0" spc="154">
                 <a:solidFill>
                   <a:srgbClr val="ED6D24"/>
                 </a:solidFill>
@@ -28582,7 +28582,7 @@
               </a:lnSpc>
             </a:pPr>
             <a:r>
-              <a:rPr sz="3000" b="0" spc="-60">
+              <a:rPr sz="2000" b="0" spc="-40">
                 <a:solidFill>
                   <a:srgbClr val="000B1C"/>
                 </a:solidFill>
@@ -28621,7 +28621,7 @@
               </a:lnSpc>
             </a:pPr>
             <a:r>
-              <a:rPr sz="2250" b="0">
+              <a:rPr sz="1500" b="0">
                 <a:solidFill>
                   <a:srgbClr val="2A323D"/>
                 </a:solidFill>
@@ -28660,7 +28660,7 @@
               </a:lnSpc>
             </a:pPr>
             <a:r>
-              <a:rPr sz="1650" b="0" spc="231">
+              <a:rPr sz="1100" b="0" spc="154">
                 <a:solidFill>
                   <a:srgbClr val="5C6470"/>
                 </a:solidFill>
@@ -28699,7 +28699,7 @@
               </a:lnSpc>
             </a:pPr>
             <a:r>
-              <a:rPr sz="1650" b="0" spc="231">
+              <a:rPr sz="1100" b="0" spc="154">
                 <a:solidFill>
                   <a:srgbClr val="5C6470"/>
                 </a:solidFill>
@@ -28788,7 +28788,7 @@
               </a:lnSpc>
             </a:pPr>
             <a:r>
-              <a:rPr sz="1800" b="0" spc="252">
+              <a:rPr sz="1200" b="0" spc="168">
                 <a:solidFill>
                   <a:srgbClr val="5C6470"/>
                 </a:solidFill>
@@ -28827,7 +28827,7 @@
               </a:lnSpc>
             </a:pPr>
             <a:r>
-              <a:rPr sz="5400" b="0" spc="-162">
+              <a:rPr sz="3600" b="0" spc="-108">
                 <a:solidFill>
                   <a:srgbClr val="000B1C"/>
                 </a:solidFill>
@@ -28871,7 +28871,7 @@
               <a:buChar char="·"/>
             </a:pPr>
             <a:r>
-              <a:rPr sz="2400" b="1">
+              <a:rPr sz="1600" b="1">
                 <a:solidFill>
                   <a:srgbClr val="2A323D"/>
                 </a:solidFill>
@@ -28880,7 +28880,7 @@
               <a:t>ClassPoint:</a:t>
             </a:r>
             <a:r>
-              <a:rPr sz="2400" b="0">
+              <a:rPr sz="1600" b="0">
                 <a:solidFill>
                   <a:srgbClr val="2A323D"/>
                 </a:solidFill>
@@ -28895,7 +28895,7 @@
                 <a:spcPct val="114900"/>
               </a:lnSpc>
               <a:spcBef>
-                <a:spcPts val="1350"/>
+                <a:spcPts val="900"/>
               </a:spcBef>
               <a:buClr>
                 <a:srgbClr val="ED6D24"/>
@@ -28904,7 +28904,7 @@
               <a:buChar char="·"/>
             </a:pPr>
             <a:r>
-              <a:rPr sz="2400" b="1">
+              <a:rPr sz="1600" b="1">
                 <a:solidFill>
                   <a:srgbClr val="2A323D"/>
                 </a:solidFill>
@@ -28913,7 +28913,7 @@
               <a:t>Blackboard:</a:t>
             </a:r>
             <a:r>
-              <a:rPr sz="2400" b="0">
+              <a:rPr sz="1600" b="0">
                 <a:solidFill>
                   <a:srgbClr val="2A323D"/>
                 </a:solidFill>
@@ -28928,7 +28928,7 @@
                 <a:spcPct val="114900"/>
               </a:lnSpc>
               <a:spcBef>
-                <a:spcPts val="1350"/>
+                <a:spcPts val="900"/>
               </a:spcBef>
               <a:buClr>
                 <a:srgbClr val="ED6D24"/>
@@ -28937,7 +28937,7 @@
               <a:buChar char="·"/>
             </a:pPr>
             <a:r>
-              <a:rPr sz="2400" b="1">
+              <a:rPr sz="1600" b="1">
                 <a:solidFill>
                   <a:srgbClr val="2A323D"/>
                 </a:solidFill>
@@ -28946,7 +28946,7 @@
               <a:t>p5.js web editor:</a:t>
             </a:r>
             <a:r>
-              <a:rPr sz="2400" b="0">
+              <a:rPr sz="1600" b="0">
                 <a:solidFill>
                   <a:srgbClr val="2A323D"/>
                 </a:solidFill>
@@ -28961,7 +28961,7 @@
                 <a:spcPct val="114900"/>
               </a:lnSpc>
               <a:spcBef>
-                <a:spcPts val="1350"/>
+                <a:spcPts val="900"/>
               </a:spcBef>
               <a:buClr>
                 <a:srgbClr val="ED6D24"/>
@@ -28970,7 +28970,7 @@
               <a:buChar char="·"/>
             </a:pPr>
             <a:r>
-              <a:rPr sz="2400" b="1">
+              <a:rPr sz="1600" b="1">
                 <a:solidFill>
                   <a:srgbClr val="2A323D"/>
                 </a:solidFill>
@@ -28979,7 +28979,7 @@
               <a:t>One image tool</a:t>
             </a:r>
             <a:r>
-              <a:rPr sz="2400" b="0">
+              <a:rPr sz="1600" b="0">
                 <a:solidFill>
                   <a:srgbClr val="2A323D"/>
                 </a:solidFill>
@@ -28994,7 +28994,7 @@
                 <a:spcPct val="114900"/>
               </a:lnSpc>
               <a:spcBef>
-                <a:spcPts val="1350"/>
+                <a:spcPts val="900"/>
               </a:spcBef>
               <a:buClr>
                 <a:srgbClr val="ED6D24"/>
@@ -29003,7 +29003,7 @@
               <a:buChar char="·"/>
             </a:pPr>
             <a:r>
-              <a:rPr sz="2400" b="1">
+              <a:rPr sz="1600" b="1">
                 <a:solidFill>
                   <a:srgbClr val="2A323D"/>
                 </a:solidFill>
@@ -29012,7 +29012,7 @@
               <a:t>Watch:</a:t>
             </a:r>
             <a:r>
-              <a:rPr sz="2400" b="0">
+              <a:rPr sz="1600" b="0">
                 <a:solidFill>
                   <a:srgbClr val="2A323D"/>
                 </a:solidFill>
@@ -29051,7 +29051,7 @@
               </a:lnSpc>
             </a:pPr>
             <a:r>
-              <a:rPr sz="1650" b="0" spc="231">
+              <a:rPr sz="1100" b="0" spc="154">
                 <a:solidFill>
                   <a:srgbClr val="5C6470"/>
                 </a:solidFill>
@@ -29090,7 +29090,7 @@
               </a:lnSpc>
             </a:pPr>
             <a:r>
-              <a:rPr sz="1650" b="0" spc="231">
+              <a:rPr sz="1100" b="0" spc="154">
                 <a:solidFill>
                   <a:srgbClr val="5C6470"/>
                 </a:solidFill>
@@ -29179,7 +29179,7 @@
               </a:lnSpc>
             </a:pPr>
             <a:r>
-              <a:rPr sz="1800" b="0" spc="252">
+              <a:rPr sz="1200" b="0" spc="168">
                 <a:solidFill>
                   <a:srgbClr val="5C6470"/>
                 </a:solidFill>
@@ -29218,7 +29218,7 @@
               </a:lnSpc>
             </a:pPr>
             <a:r>
-              <a:rPr sz="8250" b="0" spc="-330">
+              <a:rPr sz="5500" b="0" spc="-220">
                 <a:solidFill>
                   <a:srgbClr val="000B1C"/>
                 </a:solidFill>
@@ -29257,7 +29257,7 @@
               </a:lnSpc>
             </a:pPr>
             <a:r>
-              <a:rPr sz="2400" b="0">
+              <a:rPr sz="1600" b="0">
                 <a:solidFill>
                   <a:srgbClr val="5C6470"/>
                 </a:solidFill>
@@ -29296,7 +29296,7 @@
               </a:lnSpc>
             </a:pPr>
             <a:r>
-              <a:rPr sz="1650" b="0" spc="231">
+              <a:rPr sz="1100" b="0" spc="154">
                 <a:solidFill>
                   <a:srgbClr val="5C6470"/>
                 </a:solidFill>
@@ -29335,7 +29335,7 @@
               </a:lnSpc>
             </a:pPr>
             <a:r>
-              <a:rPr sz="1650" b="0" spc="231">
+              <a:rPr sz="1100" b="0" spc="154">
                 <a:solidFill>
                   <a:srgbClr val="5C6470"/>
                 </a:solidFill>
@@ -29424,7 +29424,7 @@
               </a:lnSpc>
             </a:pPr>
             <a:r>
-              <a:rPr sz="1800" b="0" spc="252">
+              <a:rPr sz="1200" b="0" spc="168">
                 <a:solidFill>
                   <a:srgbClr val="5C6470"/>
                 </a:solidFill>
@@ -29463,7 +29463,7 @@
               </a:lnSpc>
             </a:pPr>
             <a:r>
-              <a:rPr sz="8250" b="0" spc="-330">
+              <a:rPr sz="5500" b="0" spc="-220">
                 <a:solidFill>
                   <a:srgbClr val="000B1C"/>
                 </a:solidFill>
@@ -29502,7 +29502,7 @@
               </a:lnSpc>
             </a:pPr>
             <a:r>
-              <a:rPr sz="2400" b="0">
+              <a:rPr sz="1600" b="0">
                 <a:solidFill>
                   <a:srgbClr val="5C6470"/>
                 </a:solidFill>
@@ -29541,7 +29541,7 @@
               </a:lnSpc>
             </a:pPr>
             <a:r>
-              <a:rPr sz="1650" b="0" spc="231">
+              <a:rPr sz="1100" b="0" spc="154">
                 <a:solidFill>
                   <a:srgbClr val="5C6470"/>
                 </a:solidFill>
@@ -29580,7 +29580,7 @@
               </a:lnSpc>
             </a:pPr>
             <a:r>
-              <a:rPr sz="1650" b="0" spc="231">
+              <a:rPr sz="1100" b="0" spc="154">
                 <a:solidFill>
                   <a:srgbClr val="5C6470"/>
                 </a:solidFill>
@@ -29669,7 +29669,7 @@
               </a:lnSpc>
             </a:pPr>
             <a:r>
-              <a:rPr sz="9750" b="0" spc="-439">
+              <a:rPr sz="6500" b="0" spc="-292">
                 <a:solidFill>
                   <a:srgbClr val="FFFFFF"/>
                 </a:solidFill>
@@ -29708,7 +29708,7 @@
               </a:lnSpc>
             </a:pPr>
             <a:r>
-              <a:rPr sz="2700" b="0">
+              <a:rPr sz="1800" b="0">
                 <a:solidFill>
                   <a:srgbClr val="D3E7E8"/>
                 </a:solidFill>
@@ -29747,7 +29747,7 @@
               </a:lnSpc>
             </a:pPr>
             <a:r>
-              <a:rPr sz="1650" b="0" spc="231">
+              <a:rPr sz="1100" b="0" spc="154">
                 <a:solidFill>
                   <a:srgbClr val="B3B7BE"/>
                 </a:solidFill>
@@ -29786,7 +29786,7 @@
               </a:lnSpc>
             </a:pPr>
             <a:r>
-              <a:rPr sz="2400" b="0" spc="-96">
+              <a:rPr sz="1600" b="0" spc="-64">
                 <a:solidFill>
                   <a:srgbClr val="FFFFFF"/>
                 </a:solidFill>
@@ -29795,7 +29795,7 @@
               <a:t>a·t4</a:t>
             </a:r>
             <a:r>
-              <a:rPr sz="2400" b="0" spc="-96">
+              <a:rPr sz="1600" b="0" spc="-64">
                 <a:solidFill>
                   <a:srgbClr val="ED6D24"/>
                 </a:solidFill>
@@ -29860,7 +29860,7 @@
               </a:lnSpc>
             </a:pPr>
             <a:r>
-              <a:rPr sz="1800" b="0" spc="252">
+              <a:rPr sz="1200" b="0" spc="168">
                 <a:solidFill>
                   <a:srgbClr val="F2ECF5"/>
                 </a:solidFill>
@@ -29899,7 +29899,7 @@
               </a:lnSpc>
             </a:pPr>
             <a:r>
-              <a:rPr sz="9750" b="0" spc="-439">
+              <a:rPr sz="6500" b="0" spc="-292">
                 <a:solidFill>
                   <a:srgbClr val="FFFFFF"/>
                 </a:solidFill>
@@ -29938,7 +29938,7 @@
               </a:lnSpc>
             </a:pPr>
             <a:r>
-              <a:rPr sz="2100" b="0" spc="294">
+              <a:rPr sz="1400" b="0" spc="196">
                 <a:solidFill>
                   <a:srgbClr val="F2ECF5"/>
                 </a:solidFill>
@@ -29977,7 +29977,7 @@
               </a:lnSpc>
             </a:pPr>
             <a:r>
-              <a:rPr sz="1650" b="0" spc="231">
+              <a:rPr sz="1100" b="0" spc="154">
                 <a:solidFill>
                   <a:srgbClr val="B3B7BE"/>
                 </a:solidFill>
@@ -30016,7 +30016,7 @@
               </a:lnSpc>
             </a:pPr>
             <a:r>
-              <a:rPr sz="1650" b="0" spc="231">
+              <a:rPr sz="1100" b="0" spc="154">
                 <a:solidFill>
                   <a:srgbClr val="B3B7BE"/>
                 </a:solidFill>
@@ -30081,7 +30081,7 @@
               </a:lnSpc>
             </a:pPr>
             <a:r>
-              <a:rPr sz="1800" b="0" spc="252">
+              <a:rPr sz="1200" b="0" spc="168">
                 <a:solidFill>
                   <a:srgbClr val="5C6470"/>
                 </a:solidFill>
@@ -30120,7 +30120,7 @@
               </a:lnSpc>
             </a:pPr>
             <a:r>
-              <a:rPr sz="5400" b="0" spc="-162">
+              <a:rPr sz="3600" b="0" spc="-108">
                 <a:solidFill>
                   <a:srgbClr val="000B1C"/>
                 </a:solidFill>
@@ -30159,7 +30159,7 @@
               </a:lnSpc>
             </a:pPr>
             <a:r>
-              <a:rPr sz="2250" b="0">
+              <a:rPr sz="1500" b="0">
                 <a:solidFill>
                   <a:srgbClr val="2A323D"/>
                 </a:solidFill>
@@ -30174,7 +30174,7 @@
                 <a:spcPct val="110500"/>
               </a:lnSpc>
               <a:spcBef>
-                <a:spcPts val="1350"/>
+                <a:spcPts val="900"/>
               </a:spcBef>
               <a:buClr>
                 <a:srgbClr val="ED6D24"/>
@@ -30183,7 +30183,7 @@
               <a:buChar char="·"/>
             </a:pPr>
             <a:r>
-              <a:rPr sz="2250" b="0">
+              <a:rPr sz="1500" b="0">
                 <a:solidFill>
                   <a:srgbClr val="2A323D"/>
                 </a:solidFill>
@@ -30198,7 +30198,7 @@
                 <a:spcPct val="110500"/>
               </a:lnSpc>
               <a:spcBef>
-                <a:spcPts val="1350"/>
+                <a:spcPts val="900"/>
               </a:spcBef>
               <a:buClr>
                 <a:srgbClr val="ED6D24"/>
@@ -30207,7 +30207,7 @@
               <a:buChar char="·"/>
             </a:pPr>
             <a:r>
-              <a:rPr sz="2250" b="0">
+              <a:rPr sz="1500" b="0">
                 <a:solidFill>
                   <a:srgbClr val="2A323D"/>
                 </a:solidFill>
@@ -30222,7 +30222,7 @@
                 <a:spcPct val="110500"/>
               </a:lnSpc>
               <a:spcBef>
-                <a:spcPts val="1350"/>
+                <a:spcPts val="900"/>
               </a:spcBef>
               <a:buClr>
                 <a:srgbClr val="ED6D24"/>
@@ -30231,7 +30231,7 @@
               <a:buChar char="·"/>
             </a:pPr>
             <a:r>
-              <a:rPr sz="2250" b="0">
+              <a:rPr sz="1500" b="0">
                 <a:solidFill>
                   <a:srgbClr val="2A323D"/>
                 </a:solidFill>
@@ -30367,7 +30367,7 @@
               </a:lnSpc>
             </a:pPr>
             <a:r>
-              <a:rPr sz="1500" b="0">
+              <a:rPr sz="1000" b="0">
                 <a:solidFill>
                   <a:srgbClr val="5C6470"/>
                 </a:solidFill>
@@ -30406,7 +30406,7 @@
               </a:lnSpc>
             </a:pPr>
             <a:r>
-              <a:rPr sz="1650" b="0" spc="231">
+              <a:rPr sz="1100" b="0" spc="154">
                 <a:solidFill>
                   <a:srgbClr val="5C6470"/>
                 </a:solidFill>
@@ -30445,7 +30445,7 @@
               </a:lnSpc>
             </a:pPr>
             <a:r>
-              <a:rPr sz="1650" b="0" spc="231">
+              <a:rPr sz="1100" b="0" spc="154">
                 <a:solidFill>
                   <a:srgbClr val="5C6470"/>
                 </a:solidFill>
@@ -30534,7 +30534,7 @@
               </a:lnSpc>
             </a:pPr>
             <a:r>
-              <a:rPr sz="1800" b="0" spc="252">
+              <a:rPr sz="1200" b="0" spc="168">
                 <a:solidFill>
                   <a:srgbClr val="5C6470"/>
                 </a:solidFill>
@@ -30573,7 +30573,7 @@
               </a:lnSpc>
             </a:pPr>
             <a:r>
-              <a:rPr sz="5400" b="0" spc="-162">
+              <a:rPr sz="3600" b="0" spc="-108">
                 <a:solidFill>
                   <a:srgbClr val="000B1C"/>
                 </a:solidFill>
@@ -30656,7 +30656,7 @@
               </a:lnSpc>
             </a:pPr>
             <a:r>
-              <a:rPr sz="3300" b="0" spc="-132">
+              <a:rPr sz="2200" b="0" spc="-88">
                 <a:solidFill>
                   <a:srgbClr val="FFFFFF"/>
                 </a:solidFill>
@@ -30695,7 +30695,7 @@
               </a:lnSpc>
             </a:pPr>
             <a:r>
-              <a:rPr sz="2550" b="0" spc="-51">
+              <a:rPr sz="1700" b="0" spc="-34">
                 <a:solidFill>
                   <a:srgbClr val="000B1C"/>
                 </a:solidFill>
@@ -30734,7 +30734,7 @@
               </a:lnSpc>
             </a:pPr>
             <a:r>
-              <a:rPr sz="1650" b="0" spc="165">
+              <a:rPr sz="1100" b="0" spc="110">
                 <a:solidFill>
                   <a:srgbClr val="ED6D24"/>
                 </a:solidFill>
@@ -30773,7 +30773,7 @@
               </a:lnSpc>
             </a:pPr>
             <a:r>
-              <a:rPr sz="1950" b="0">
+              <a:rPr sz="1300" b="0">
                 <a:solidFill>
                   <a:srgbClr val="2A323D"/>
                 </a:solidFill>
@@ -30788,11 +30788,11 @@
                 <a:spcPct val="106400"/>
               </a:lnSpc>
               <a:spcBef>
-                <a:spcPts val="750"/>
+                <a:spcPts val="500"/>
               </a:spcBef>
             </a:pPr>
             <a:r>
-              <a:rPr sz="1950" b="0">
+              <a:rPr sz="1300" b="0">
                 <a:solidFill>
                   <a:srgbClr val="2A323D"/>
                 </a:solidFill>
@@ -30875,7 +30875,7 @@
               </a:lnSpc>
             </a:pPr>
             <a:r>
-              <a:rPr sz="3300" b="0" spc="-132">
+              <a:rPr sz="2200" b="0" spc="-88">
                 <a:solidFill>
                   <a:srgbClr val="000B1C"/>
                 </a:solidFill>
@@ -30914,7 +30914,7 @@
               </a:lnSpc>
             </a:pPr>
             <a:r>
-              <a:rPr sz="2550" b="0" spc="-51">
+              <a:rPr sz="1700" b="0" spc="-34">
                 <a:solidFill>
                   <a:srgbClr val="000B1C"/>
                 </a:solidFill>
@@ -30953,7 +30953,7 @@
               </a:lnSpc>
             </a:pPr>
             <a:r>
-              <a:rPr sz="1650" b="0" spc="165">
+              <a:rPr sz="1100" b="0" spc="110">
                 <a:solidFill>
                   <a:srgbClr val="ED6D24"/>
                 </a:solidFill>
@@ -30992,7 +30992,7 @@
               </a:lnSpc>
             </a:pPr>
             <a:r>
-              <a:rPr sz="1950" b="0">
+              <a:rPr sz="1300" b="0">
                 <a:solidFill>
                   <a:srgbClr val="2A323D"/>
                 </a:solidFill>
@@ -31001,7 +31001,7 @@
               <a:t>In the room </a:t>
             </a:r>
             <a:r>
-              <a:rPr sz="1950" b="1">
+              <a:rPr sz="1300" b="1">
                 <a:solidFill>
                   <a:srgbClr val="2A323D"/>
                 </a:solidFill>
@@ -31010,7 +31010,7 @@
               <a:t>30 minutes before</a:t>
             </a:r>
             <a:r>
-              <a:rPr sz="1950" b="0">
+              <a:rPr sz="1300" b="0">
                 <a:solidFill>
                   <a:srgbClr val="2A323D"/>
                 </a:solidFill>
@@ -31019,7 +31019,7 @@
               <a:t> and </a:t>
             </a:r>
             <a:r>
-              <a:rPr sz="1950" b="1">
+              <a:rPr sz="1300" b="1">
                 <a:solidFill>
                   <a:srgbClr val="2A323D"/>
                 </a:solidFill>
@@ -31028,7 +31028,7 @@
               <a:t>30 minutes after</a:t>
             </a:r>
             <a:r>
-              <a:rPr sz="1950" b="0">
+              <a:rPr sz="1300" b="0">
                 <a:solidFill>
                   <a:srgbClr val="2A323D"/>
                 </a:solidFill>
@@ -31043,11 +31043,11 @@
                 <a:spcPct val="106400"/>
               </a:lnSpc>
               <a:spcBef>
-                <a:spcPts val="750"/>
+                <a:spcPts val="500"/>
               </a:spcBef>
             </a:pPr>
             <a:r>
-              <a:rPr sz="1950" b="0">
+              <a:rPr sz="1300" b="0">
                 <a:solidFill>
                   <a:srgbClr val="2A323D"/>
                 </a:solidFill>
@@ -31130,7 +31130,7 @@
               </a:lnSpc>
             </a:pPr>
             <a:r>
-              <a:rPr sz="3300" b="0" spc="-132">
+              <a:rPr sz="2200" b="0" spc="-88">
                 <a:solidFill>
                   <a:srgbClr val="000B1C"/>
                 </a:solidFill>
@@ -31169,7 +31169,7 @@
               </a:lnSpc>
             </a:pPr>
             <a:r>
-              <a:rPr sz="2550" b="0" spc="-51">
+              <a:rPr sz="1700" b="0" spc="-34">
                 <a:solidFill>
                   <a:srgbClr val="000B1C"/>
                 </a:solidFill>
@@ -31208,7 +31208,7 @@
               </a:lnSpc>
             </a:pPr>
             <a:r>
-              <a:rPr sz="1650" b="0" spc="165">
+              <a:rPr sz="1100" b="0" spc="110">
                 <a:solidFill>
                   <a:srgbClr val="ED6D24"/>
                 </a:solidFill>
@@ -31247,7 +31247,7 @@
               </a:lnSpc>
             </a:pPr>
             <a:r>
-              <a:rPr sz="1950" b="0">
+              <a:rPr sz="1300" b="0">
                 <a:solidFill>
                   <a:srgbClr val="2A323D"/>
                 </a:solidFill>
@@ -31256,7 +31256,7 @@
               <a:t>In the room </a:t>
             </a:r>
             <a:r>
-              <a:rPr sz="1950" b="1">
+              <a:rPr sz="1300" b="1">
                 <a:solidFill>
                   <a:srgbClr val="2A323D"/>
                 </a:solidFill>
@@ -31265,7 +31265,7 @@
               <a:t>30 minutes before</a:t>
             </a:r>
             <a:r>
-              <a:rPr sz="1950" b="0">
+              <a:rPr sz="1300" b="0">
                 <a:solidFill>
                   <a:srgbClr val="2A323D"/>
                 </a:solidFill>
@@ -31274,7 +31274,7 @@
               <a:t> and </a:t>
             </a:r>
             <a:r>
-              <a:rPr sz="1950" b="1">
+              <a:rPr sz="1300" b="1">
                 <a:solidFill>
                   <a:srgbClr val="2A323D"/>
                 </a:solidFill>
@@ -31283,7 +31283,7 @@
               <a:t>30 minutes after</a:t>
             </a:r>
             <a:r>
-              <a:rPr sz="1950" b="0">
+              <a:rPr sz="1300" b="0">
                 <a:solidFill>
                   <a:srgbClr val="2A323D"/>
                 </a:solidFill>
@@ -31298,11 +31298,11 @@
                 <a:spcPct val="106400"/>
               </a:lnSpc>
               <a:spcBef>
-                <a:spcPts val="750"/>
+                <a:spcPts val="500"/>
               </a:spcBef>
             </a:pPr>
             <a:r>
-              <a:rPr sz="1950" b="0">
+              <a:rPr sz="1300" b="0">
                 <a:solidFill>
                   <a:srgbClr val="2A323D"/>
                 </a:solidFill>
@@ -31385,7 +31385,7 @@
               </a:lnSpc>
             </a:pPr>
             <a:r>
-              <a:rPr sz="3300" b="0" spc="-132">
+              <a:rPr sz="2200" b="0" spc="-88">
                 <a:solidFill>
                   <a:srgbClr val="FFFFFF"/>
                 </a:solidFill>
@@ -31424,7 +31424,7 @@
               </a:lnSpc>
             </a:pPr>
             <a:r>
-              <a:rPr sz="2550" b="0" spc="-51">
+              <a:rPr sz="1700" b="0" spc="-34">
                 <a:solidFill>
                   <a:srgbClr val="000B1C"/>
                 </a:solidFill>
@@ -31463,7 +31463,7 @@
               </a:lnSpc>
             </a:pPr>
             <a:r>
-              <a:rPr sz="1650" b="0" spc="165">
+              <a:rPr sz="1100" b="0" spc="110">
                 <a:solidFill>
                   <a:srgbClr val="ED6D24"/>
                 </a:solidFill>
@@ -31502,7 +31502,7 @@
               </a:lnSpc>
             </a:pPr>
             <a:r>
-              <a:rPr sz="1950" b="0">
+              <a:rPr sz="1300" b="0">
                 <a:solidFill>
                   <a:srgbClr val="2A323D"/>
                 </a:solidFill>
@@ -31517,11 +31517,11 @@
                 <a:spcPct val="106400"/>
               </a:lnSpc>
               <a:spcBef>
-                <a:spcPts val="750"/>
+                <a:spcPts val="500"/>
               </a:spcBef>
             </a:pPr>
             <a:r>
-              <a:rPr sz="1950" b="1">
+              <a:rPr sz="1300" b="1">
                 <a:solidFill>
                   <a:srgbClr val="2A323D"/>
                 </a:solidFill>
@@ -31530,7 +31530,7 @@
               <a:t>Cannot come? Tell Zhibin before class.</a:t>
             </a:r>
             <a:r>
-              <a:rPr sz="1950" b="0">
+              <a:rPr sz="1300" b="0">
                 <a:solidFill>
                   <a:srgbClr val="2A323D"/>
                 </a:solidFill>
@@ -31569,7 +31569,7 @@
               </a:lnSpc>
             </a:pPr>
             <a:r>
-              <a:rPr sz="1650" b="0" spc="231">
+              <a:rPr sz="1100" b="0" spc="154">
                 <a:solidFill>
                   <a:srgbClr val="5C6470"/>
                 </a:solidFill>
@@ -31608,7 +31608,7 @@
               </a:lnSpc>
             </a:pPr>
             <a:r>
-              <a:rPr sz="1650" b="0" spc="231">
+              <a:rPr sz="1100" b="0" spc="154">
                 <a:solidFill>
                   <a:srgbClr val="5C6470"/>
                 </a:solidFill>
@@ -31697,7 +31697,7 @@
               </a:lnSpc>
             </a:pPr>
             <a:r>
-              <a:rPr sz="1800" b="0" spc="252">
+              <a:rPr sz="1200" b="0" spc="168">
                 <a:solidFill>
                   <a:srgbClr val="5C6470"/>
                 </a:solidFill>
@@ -31736,7 +31736,7 @@
               </a:lnSpc>
             </a:pPr>
             <a:r>
-              <a:rPr sz="8250" b="0" spc="-330">
+              <a:rPr sz="5500" b="0" spc="-220">
                 <a:solidFill>
                   <a:srgbClr val="000B1C"/>
                 </a:solidFill>
@@ -31819,7 +31819,7 @@
               </a:lnSpc>
             </a:pPr>
             <a:r>
-              <a:rPr sz="2100" b="0">
+              <a:rPr sz="1400" b="0">
                 <a:solidFill>
                   <a:srgbClr val="FFFFFF"/>
                 </a:solidFill>
@@ -31858,7 +31858,7 @@
               </a:lnSpc>
             </a:pPr>
             <a:r>
-              <a:rPr sz="2550" b="0">
+              <a:rPr sz="1700" b="0">
                 <a:solidFill>
                   <a:srgbClr val="000B1C"/>
                 </a:solidFill>
@@ -31941,7 +31941,7 @@
               </a:lnSpc>
             </a:pPr>
             <a:r>
-              <a:rPr sz="2100" b="0">
+              <a:rPr sz="1400" b="0">
                 <a:solidFill>
                   <a:srgbClr val="FFFFFF"/>
                 </a:solidFill>
@@ -31980,7 +31980,7 @@
               </a:lnSpc>
             </a:pPr>
             <a:r>
-              <a:rPr sz="2550" b="0">
+              <a:rPr sz="1700" b="0">
                 <a:solidFill>
                   <a:srgbClr val="000B1C"/>
                 </a:solidFill>
@@ -32063,7 +32063,7 @@
               </a:lnSpc>
             </a:pPr>
             <a:r>
-              <a:rPr sz="2100" b="0">
+              <a:rPr sz="1400" b="0">
                 <a:solidFill>
                   <a:srgbClr val="FFFFFF"/>
                 </a:solidFill>
@@ -32102,7 +32102,7 @@
               </a:lnSpc>
             </a:pPr>
             <a:r>
-              <a:rPr sz="2550" b="0">
+              <a:rPr sz="1700" b="0">
                 <a:solidFill>
                   <a:srgbClr val="000B1C"/>
                 </a:solidFill>
@@ -32185,7 +32185,7 @@
               </a:lnSpc>
             </a:pPr>
             <a:r>
-              <a:rPr sz="2100" b="0">
+              <a:rPr sz="1400" b="0">
                 <a:solidFill>
                   <a:srgbClr val="FFFFFF"/>
                 </a:solidFill>
@@ -32224,7 +32224,7 @@
               </a:lnSpc>
             </a:pPr>
             <a:r>
-              <a:rPr sz="2550" b="0">
+              <a:rPr sz="1700" b="0">
                 <a:solidFill>
                   <a:srgbClr val="000B1C"/>
                 </a:solidFill>
@@ -32263,7 +32263,7 @@
               </a:lnSpc>
             </a:pPr>
             <a:r>
-              <a:rPr sz="1650" b="0" spc="231">
+              <a:rPr sz="1100" b="0" spc="154">
                 <a:solidFill>
                   <a:srgbClr val="5C6470"/>
                 </a:solidFill>
@@ -32302,7 +32302,7 @@
               </a:lnSpc>
             </a:pPr>
             <a:r>
-              <a:rPr sz="1650" b="0" spc="231">
+              <a:rPr sz="1100" b="0" spc="154">
                 <a:solidFill>
                   <a:srgbClr val="5C6470"/>
                 </a:solidFill>
